--- a/data/outputs/v2/Maths/SS3.1_Trigonometry_I/quiz/Mathematics_G10_SS3.1_Trigonometry_I_L4_QuickCheck.pptx
+++ b/data/outputs/v2/Maths/SS3.1_Trigonometry_I/quiz/Mathematics_G10_SS3.1_Trigonometry_I_L4_QuickCheck.pptx
@@ -14,12 +14,9 @@
     <p:sldId id="262" r:id="rId8"/>
     <p:sldId id="263" r:id="rId9"/>
     <p:sldId id="264" r:id="rId10"/>
-    <p:sldId id="265" r:id="rId11"/>
-    <p:sldId id="266" r:id="rId12"/>
-    <p:sldId id="267" r:id="rId13"/>
   </p:sldIdLst>
   <p:notesMasterIdLst>
-    <p:notesMasterId r:id="rId14"/>
+    <p:notesMasterId r:id="rId11"/>
   </p:notesMasterIdLst>
   <p:sldSz cx="12192000" cy="6858000"/>
   <p:notesSz cx="6858000" cy="12192000"/>
@@ -537,270 +534,6 @@
             <a:fld id="{F7021451-1387-4CA6-816F-3879F97B5CBC}" type="slidenum">
               <a:rPr lang="en-US"/>
               <a:t>1</a:t>
-            </a:fld>
-            <a:endParaRPr lang="en-US"/>
-          </a:p>
-        </p:txBody>
-      </p:sp>
-    </p:spTree>
-    <p:extLst>
-      <p:ext uri="{BB962C8B-B14F-4D97-AF65-F5344CB8AC3E}">
-        <p14:creationId xmlns:p14="http://schemas.microsoft.com/office/powerpoint/2010/main" val="1024086991"/>
-      </p:ext>
-    </p:extLst>
-  </p:cSld>
-  <p:clrMapOvr>
-    <a:masterClrMapping/>
-  </p:clrMapOvr>
-</p:notes>
-</file>
-
-<file path=ppt/notesSlides/notesSlide10.xml><?xml version="1.0" encoding="utf-8"?>
-<p:notes xmlns:a="http://schemas.openxmlformats.org/drawingml/2006/main" xmlns:r="http://schemas.openxmlformats.org/officeDocument/2006/relationships" xmlns:p="http://schemas.openxmlformats.org/presentationml/2006/main">
-  <p:cSld>
-    <p:spTree>
-      <p:nvGrpSpPr>
-        <p:cNvPr id="1" name=""/>
-        <p:cNvGrpSpPr/>
-        <p:nvPr/>
-      </p:nvGrpSpPr>
-      <p:grpSpPr>
-        <a:xfrm>
-          <a:off x="0" y="0"/>
-          <a:ext cx="0" cy="0"/>
-          <a:chOff x="0" y="0"/>
-          <a:chExt cx="0" cy="0"/>
-        </a:xfrm>
-      </p:grpSpPr>
-      <p:sp>
-        <p:nvSpPr>
-          <p:cNvPr id="2" name="Slide Image Placeholder 1"/>
-          <p:cNvSpPr>
-            <a:spLocks noGrp="1" noRot="1" noChangeAspect="1"/>
-          </p:cNvSpPr>
-          <p:nvPr>
-            <p:ph type="sldImg"/>
-          </p:nvPr>
-        </p:nvSpPr>
-        <p:spPr/>
-      </p:sp>
-      <p:sp>
-        <p:nvSpPr>
-          <p:cNvPr id="3" name="Notes Placeholder 2"/>
-          <p:cNvSpPr>
-            <a:spLocks noGrp="1"/>
-          </p:cNvSpPr>
-          <p:nvPr>
-            <p:ph type="body" idx="1"/>
-          </p:nvPr>
-        </p:nvSpPr>
-        <p:spPr/>
-        <p:txBody>
-          <a:bodyPr/>
-          <a:lstStyle/>
-          <a:p>
-            <a:r>
-              <a:rPr lang="en-US" dirty="0"/>
-              <a:t/>
-            </a:r>
-            <a:endParaRPr lang="en-US" dirty="0"/>
-          </a:p>
-        </p:txBody>
-      </p:sp>
-      <p:sp>
-        <p:nvSpPr>
-          <p:cNvPr id="4" name="Slide Number Placeholder 3"/>
-          <p:cNvSpPr>
-            <a:spLocks noGrp="1"/>
-          </p:cNvSpPr>
-          <p:nvPr>
-            <p:ph type="sldNum" sz="quarter" idx="10"/>
-          </p:nvPr>
-        </p:nvSpPr>
-        <p:spPr/>
-        <p:txBody>
-          <a:bodyPr/>
-          <a:lstStyle/>
-          <a:p>
-            <a:fld id="{F7021451-1387-4CA6-816F-3879F97B5CBC}" type="slidenum">
-              <a:rPr lang="en-US"/>
-              <a:t>10</a:t>
-            </a:fld>
-            <a:endParaRPr lang="en-US"/>
-          </a:p>
-        </p:txBody>
-      </p:sp>
-    </p:spTree>
-    <p:extLst>
-      <p:ext uri="{BB962C8B-B14F-4D97-AF65-F5344CB8AC3E}">
-        <p14:creationId xmlns:p14="http://schemas.microsoft.com/office/powerpoint/2010/main" val="1024086991"/>
-      </p:ext>
-    </p:extLst>
-  </p:cSld>
-  <p:clrMapOvr>
-    <a:masterClrMapping/>
-  </p:clrMapOvr>
-</p:notes>
-</file>
-
-<file path=ppt/notesSlides/notesSlide11.xml><?xml version="1.0" encoding="utf-8"?>
-<p:notes xmlns:a="http://schemas.openxmlformats.org/drawingml/2006/main" xmlns:r="http://schemas.openxmlformats.org/officeDocument/2006/relationships" xmlns:p="http://schemas.openxmlformats.org/presentationml/2006/main">
-  <p:cSld>
-    <p:spTree>
-      <p:nvGrpSpPr>
-        <p:cNvPr id="1" name=""/>
-        <p:cNvGrpSpPr/>
-        <p:nvPr/>
-      </p:nvGrpSpPr>
-      <p:grpSpPr>
-        <a:xfrm>
-          <a:off x="0" y="0"/>
-          <a:ext cx="0" cy="0"/>
-          <a:chOff x="0" y="0"/>
-          <a:chExt cx="0" cy="0"/>
-        </a:xfrm>
-      </p:grpSpPr>
-      <p:sp>
-        <p:nvSpPr>
-          <p:cNvPr id="2" name="Slide Image Placeholder 1"/>
-          <p:cNvSpPr>
-            <a:spLocks noGrp="1" noRot="1" noChangeAspect="1"/>
-          </p:cNvSpPr>
-          <p:nvPr>
-            <p:ph type="sldImg"/>
-          </p:nvPr>
-        </p:nvSpPr>
-        <p:spPr/>
-      </p:sp>
-      <p:sp>
-        <p:nvSpPr>
-          <p:cNvPr id="3" name="Notes Placeholder 2"/>
-          <p:cNvSpPr>
-            <a:spLocks noGrp="1"/>
-          </p:cNvSpPr>
-          <p:nvPr>
-            <p:ph type="body" idx="1"/>
-          </p:nvPr>
-        </p:nvSpPr>
-        <p:spPr/>
-        <p:txBody>
-          <a:bodyPr/>
-          <a:lstStyle/>
-          <a:p>
-            <a:r>
-              <a:rPr lang="en-US" dirty="0"/>
-              <a:t/>
-            </a:r>
-            <a:endParaRPr lang="en-US" dirty="0"/>
-          </a:p>
-        </p:txBody>
-      </p:sp>
-      <p:sp>
-        <p:nvSpPr>
-          <p:cNvPr id="4" name="Slide Number Placeholder 3"/>
-          <p:cNvSpPr>
-            <a:spLocks noGrp="1"/>
-          </p:cNvSpPr>
-          <p:nvPr>
-            <p:ph type="sldNum" sz="quarter" idx="10"/>
-          </p:nvPr>
-        </p:nvSpPr>
-        <p:spPr/>
-        <p:txBody>
-          <a:bodyPr/>
-          <a:lstStyle/>
-          <a:p>
-            <a:fld id="{F7021451-1387-4CA6-816F-3879F97B5CBC}" type="slidenum">
-              <a:rPr lang="en-US"/>
-              <a:t>11</a:t>
-            </a:fld>
-            <a:endParaRPr lang="en-US"/>
-          </a:p>
-        </p:txBody>
-      </p:sp>
-    </p:spTree>
-    <p:extLst>
-      <p:ext uri="{BB962C8B-B14F-4D97-AF65-F5344CB8AC3E}">
-        <p14:creationId xmlns:p14="http://schemas.microsoft.com/office/powerpoint/2010/main" val="1024086991"/>
-      </p:ext>
-    </p:extLst>
-  </p:cSld>
-  <p:clrMapOvr>
-    <a:masterClrMapping/>
-  </p:clrMapOvr>
-</p:notes>
-</file>
-
-<file path=ppt/notesSlides/notesSlide12.xml><?xml version="1.0" encoding="utf-8"?>
-<p:notes xmlns:a="http://schemas.openxmlformats.org/drawingml/2006/main" xmlns:r="http://schemas.openxmlformats.org/officeDocument/2006/relationships" xmlns:p="http://schemas.openxmlformats.org/presentationml/2006/main">
-  <p:cSld>
-    <p:spTree>
-      <p:nvGrpSpPr>
-        <p:cNvPr id="1" name=""/>
-        <p:cNvGrpSpPr/>
-        <p:nvPr/>
-      </p:nvGrpSpPr>
-      <p:grpSpPr>
-        <a:xfrm>
-          <a:off x="0" y="0"/>
-          <a:ext cx="0" cy="0"/>
-          <a:chOff x="0" y="0"/>
-          <a:chExt cx="0" cy="0"/>
-        </a:xfrm>
-      </p:grpSpPr>
-      <p:sp>
-        <p:nvSpPr>
-          <p:cNvPr id="2" name="Slide Image Placeholder 1"/>
-          <p:cNvSpPr>
-            <a:spLocks noGrp="1" noRot="1" noChangeAspect="1"/>
-          </p:cNvSpPr>
-          <p:nvPr>
-            <p:ph type="sldImg"/>
-          </p:nvPr>
-        </p:nvSpPr>
-        <p:spPr/>
-      </p:sp>
-      <p:sp>
-        <p:nvSpPr>
-          <p:cNvPr id="3" name="Notes Placeholder 2"/>
-          <p:cNvSpPr>
-            <a:spLocks noGrp="1"/>
-          </p:cNvSpPr>
-          <p:nvPr>
-            <p:ph type="body" idx="1"/>
-          </p:nvPr>
-        </p:nvSpPr>
-        <p:spPr/>
-        <p:txBody>
-          <a:bodyPr/>
-          <a:lstStyle/>
-          <a:p>
-            <a:r>
-              <a:rPr lang="en-US" dirty="0"/>
-              <a:t/>
-            </a:r>
-            <a:endParaRPr lang="en-US" dirty="0"/>
-          </a:p>
-        </p:txBody>
-      </p:sp>
-      <p:sp>
-        <p:nvSpPr>
-          <p:cNvPr id="4" name="Slide Number Placeholder 3"/>
-          <p:cNvSpPr>
-            <a:spLocks noGrp="1"/>
-          </p:cNvSpPr>
-          <p:nvPr>
-            <p:ph type="sldNum" sz="quarter" idx="10"/>
-          </p:nvPr>
-        </p:nvSpPr>
-        <p:spPr/>
-        <p:txBody>
-          <a:bodyPr/>
-          <a:lstStyle/>
-          <a:p>
-            <a:fld id="{F7021451-1387-4CA6-816F-3879F97B5CBC}" type="slidenum">
-              <a:rPr lang="en-US"/>
-              <a:t>12</a:t>
             </a:fld>
             <a:endParaRPr lang="en-US"/>
           </a:p>
@@ -2004,7 +1737,7 @@
                 <a:ea typeface="Arial" pitchFamily="34" charset="-122"/>
                 <a:cs typeface="Arial" pitchFamily="34" charset="-120"/>
               </a:rPr>
-              <a:t>10 multiple-choice questions  •  choose A, B, C or D</a:t>
+              <a:t>7 multiple-choice questions  •  choose A, B, C or D</a:t>
             </a:r>
             <a:endParaRPr lang="en-US" sz="1600" dirty="0"/>
           </a:p>
@@ -2120,1336 +1853,6 @@
               <a:t> (https://creativecommons.org/licenses/by-nc/4.0/).</a:t>
             </a:r>
             <a:endParaRPr lang="en-US" sz="900" dirty="0"/>
-          </a:p>
-        </p:txBody>
-      </p:sp>
-    </p:spTree>
-  </p:cSld>
-  <p:clrMapOvr>
-    <a:masterClrMapping/>
-  </p:clrMapOvr>
-</p:sld>
-</file>
-
-<file path=ppt/slides/slide10.xml><?xml version="1.0" encoding="utf-8"?>
-<p:sld xmlns:a="http://schemas.openxmlformats.org/drawingml/2006/main" xmlns:r="http://schemas.openxmlformats.org/officeDocument/2006/relationships" xmlns:p="http://schemas.openxmlformats.org/presentationml/2006/main">
-  <p:cSld name="Slide 10">
-    <p:bg>
-      <p:bgPr>
-        <a:solidFill>
-          <a:srgbClr val="6A4C93"/>
-        </a:solidFill>
-      </p:bgPr>
-    </p:bg>
-    <p:spTree>
-      <p:nvGrpSpPr>
-        <p:cNvPr id="1" name=""/>
-        <p:cNvGrpSpPr/>
-        <p:nvPr/>
-      </p:nvGrpSpPr>
-      <p:grpSpPr>
-        <a:xfrm>
-          <a:off x="0" y="0"/>
-          <a:ext cx="0" cy="0"/>
-          <a:chOff x="0" y="0"/>
-          <a:chExt cx="0" cy="0"/>
-        </a:xfrm>
-      </p:grpSpPr>
-      <p:sp>
-        <p:nvSpPr>
-          <p:cNvPr id="2" name="Text 0"/>
-          <p:cNvSpPr/>
-          <p:nvPr/>
-        </p:nvSpPr>
-        <p:spPr>
-          <a:xfrm>
-            <a:off x="548640" y="365760"/>
-            <a:ext cx="6400800" cy="365760"/>
-          </a:xfrm>
-          <a:prstGeom prst="rect">
-            <a:avLst/>
-          </a:prstGeom>
-          <a:noFill/>
-          <a:ln/>
-        </p:spPr>
-        <p:txBody>
-          <a:bodyPr wrap="square" lIns="0" tIns="0" rIns="0" bIns="0" rtlCol="0" anchor="ctr"/>
-          <a:lstStyle/>
-          <a:p>
-            <a:pPr indent="0" marL="0">
-              <a:buNone/>
-            </a:pPr>
-            <a:r>
-              <a:rPr lang="en-US" sz="1300" b="1" spc="200" kern="0" dirty="0">
-                <a:solidFill>
-                  <a:srgbClr val="E0D6F0"/>
-                </a:solidFill>
-                <a:latin typeface="Arial" pitchFamily="34" charset="0"/>
-                <a:ea typeface="Arial" pitchFamily="34" charset="-122"/>
-                <a:cs typeface="Arial" pitchFamily="34" charset="-120"/>
-              </a:rPr>
-              <a:t>QUESTION 9 OF 10</a:t>
-            </a:r>
-            <a:endParaRPr lang="en-US" sz="1300" dirty="0"/>
-          </a:p>
-        </p:txBody>
-      </p:sp>
-      <p:sp>
-        <p:nvSpPr>
-          <p:cNvPr id="3" name="Shape 1"/>
-          <p:cNvSpPr/>
-          <p:nvPr/>
-        </p:nvSpPr>
-        <p:spPr>
-          <a:xfrm>
-            <a:off x="8138160" y="320040"/>
-            <a:ext cx="3474720" cy="365760"/>
-          </a:xfrm>
-          <a:prstGeom prst="roundRect">
-            <a:avLst>
-              <a:gd name="adj" fmla="val 15000"/>
-            </a:avLst>
-          </a:prstGeom>
-          <a:solidFill>
-            <a:srgbClr val="5A3F80"/>
-          </a:solidFill>
-          <a:ln/>
-        </p:spPr>
-      </p:sp>
-      <p:sp>
-        <p:nvSpPr>
-          <p:cNvPr id="4" name="Text 2"/>
-          <p:cNvSpPr/>
-          <p:nvPr/>
-        </p:nvSpPr>
-        <p:spPr>
-          <a:xfrm>
-            <a:off x="8138160" y="320040"/>
-            <a:ext cx="3474720" cy="365760"/>
-          </a:xfrm>
-          <a:prstGeom prst="rect">
-            <a:avLst/>
-          </a:prstGeom>
-          <a:noFill/>
-          <a:ln/>
-        </p:spPr>
-        <p:txBody>
-          <a:bodyPr wrap="square" lIns="0" tIns="0" rIns="0" bIns="0" rtlCol="0" anchor="ctr"/>
-          <a:lstStyle/>
-          <a:p>
-            <a:pPr algn="ctr" indent="0" marL="0">
-              <a:buNone/>
-            </a:pPr>
-            <a:r>
-              <a:rPr lang="en-US" sz="1100" i="1" dirty="0">
-                <a:solidFill>
-                  <a:srgbClr val="E0D6F0"/>
-                </a:solidFill>
-                <a:latin typeface="Arial" pitchFamily="34" charset="0"/>
-                <a:ea typeface="Arial" pitchFamily="34" charset="-122"/>
-                <a:cs typeface="Arial" pitchFamily="34" charset="-120"/>
-              </a:rPr>
-              <a:t>Use after: Explain phase</a:t>
-            </a:r>
-            <a:endParaRPr lang="en-US" sz="1100" dirty="0"/>
-          </a:p>
-        </p:txBody>
-      </p:sp>
-      <p:sp>
-        <p:nvSpPr>
-          <p:cNvPr id="5" name="Text 3"/>
-          <p:cNvSpPr/>
-          <p:nvPr/>
-        </p:nvSpPr>
-        <p:spPr>
-          <a:xfrm>
-            <a:off x="548640" y="868680"/>
-            <a:ext cx="11064240" cy="1325880"/>
-          </a:xfrm>
-          <a:prstGeom prst="rect">
-            <a:avLst/>
-          </a:prstGeom>
-          <a:noFill/>
-          <a:ln/>
-        </p:spPr>
-        <p:txBody>
-          <a:bodyPr wrap="square" lIns="0" tIns="0" rIns="0" bIns="0" rtlCol="0" anchor="ctr"/>
-          <a:lstStyle/>
-          <a:p>
-            <a:pPr indent="0" marL="0">
-              <a:buNone/>
-            </a:pPr>
-            <a:r>
-              <a:rPr lang="en-US" sz="1800" b="1" dirty="0">
-                <a:solidFill>
-                  <a:srgbClr val="FFFFFF"/>
-                </a:solidFill>
-                <a:latin typeface="Arial" pitchFamily="34" charset="0"/>
-                <a:ea typeface="Arial" pitchFamily="34" charset="-122"/>
-                <a:cs typeface="Arial" pitchFamily="34" charset="-120"/>
-              </a:rPr>
-              <a:t>A student is 1.6 m tall and her shadow is 1.2 m long. At the same time, a mango tree has a shadow 9.0 m long. Using similar triangles, (tree height) ÷ 9.0 = 1.6 ÷ 1.2. What is the height of the tree?</a:t>
-            </a:r>
-            <a:endParaRPr lang="en-US" sz="1800" dirty="0"/>
-          </a:p>
-        </p:txBody>
-      </p:sp>
-      <p:sp>
-        <p:nvSpPr>
-          <p:cNvPr id="6" name="Shape 4"/>
-          <p:cNvSpPr/>
-          <p:nvPr/>
-        </p:nvSpPr>
-        <p:spPr>
-          <a:xfrm>
-            <a:off x="731520" y="2331720"/>
-            <a:ext cx="10698480" cy="777240"/>
-          </a:xfrm>
-          <a:prstGeom prst="roundRect">
-            <a:avLst>
-              <a:gd name="adj" fmla="val 9412"/>
-            </a:avLst>
-          </a:prstGeom>
-          <a:solidFill>
-            <a:srgbClr val="7C5CAA"/>
-          </a:solidFill>
-          <a:ln/>
-        </p:spPr>
-      </p:sp>
-      <p:sp>
-        <p:nvSpPr>
-          <p:cNvPr id="7" name="Text 5"/>
-          <p:cNvSpPr/>
-          <p:nvPr/>
-        </p:nvSpPr>
-        <p:spPr>
-          <a:xfrm>
-            <a:off x="914400" y="2331720"/>
-            <a:ext cx="548640" cy="777240"/>
-          </a:xfrm>
-          <a:prstGeom prst="rect">
-            <a:avLst/>
-          </a:prstGeom>
-          <a:noFill/>
-          <a:ln/>
-        </p:spPr>
-        <p:txBody>
-          <a:bodyPr wrap="square" lIns="0" tIns="0" rIns="0" bIns="0" rtlCol="0" anchor="ctr"/>
-          <a:lstStyle/>
-          <a:p>
-            <a:pPr indent="0" marL="0">
-              <a:buNone/>
-            </a:pPr>
-            <a:r>
-              <a:rPr lang="en-US" sz="1800" b="1" dirty="0">
-                <a:solidFill>
-                  <a:srgbClr val="FFFFFF"/>
-                </a:solidFill>
-                <a:latin typeface="Arial" pitchFamily="34" charset="0"/>
-                <a:ea typeface="Arial" pitchFamily="34" charset="-122"/>
-                <a:cs typeface="Arial" pitchFamily="34" charset="-120"/>
-              </a:rPr>
-              <a:t>A</a:t>
-            </a:r>
-            <a:endParaRPr lang="en-US" sz="1800" dirty="0"/>
-          </a:p>
-        </p:txBody>
-      </p:sp>
-      <p:sp>
-        <p:nvSpPr>
-          <p:cNvPr id="8" name="Text 6"/>
-          <p:cNvSpPr/>
-          <p:nvPr/>
-        </p:nvSpPr>
-        <p:spPr>
-          <a:xfrm>
-            <a:off x="1554480" y="2331720"/>
-            <a:ext cx="9692640" cy="777240"/>
-          </a:xfrm>
-          <a:prstGeom prst="rect">
-            <a:avLst/>
-          </a:prstGeom>
-          <a:noFill/>
-          <a:ln/>
-        </p:spPr>
-        <p:txBody>
-          <a:bodyPr wrap="square" lIns="0" tIns="0" rIns="0" bIns="0" rtlCol="0" anchor="ctr"/>
-          <a:lstStyle/>
-          <a:p>
-            <a:pPr indent="0" marL="0">
-              <a:buNone/>
-            </a:pPr>
-            <a:r>
-              <a:rPr lang="en-US" sz="1700" dirty="0">
-                <a:solidFill>
-                  <a:srgbClr val="FFFFFF"/>
-                </a:solidFill>
-                <a:latin typeface="Arial" pitchFamily="34" charset="0"/>
-                <a:ea typeface="Arial" pitchFamily="34" charset="-122"/>
-                <a:cs typeface="Arial" pitchFamily="34" charset="-120"/>
-              </a:rPr>
-              <a:t>14.4 m</a:t>
-            </a:r>
-            <a:endParaRPr lang="en-US" sz="1700" dirty="0"/>
-          </a:p>
-        </p:txBody>
-      </p:sp>
-      <p:sp>
-        <p:nvSpPr>
-          <p:cNvPr id="9" name="Shape 7"/>
-          <p:cNvSpPr/>
-          <p:nvPr/>
-        </p:nvSpPr>
-        <p:spPr>
-          <a:xfrm>
-            <a:off x="731520" y="3246120"/>
-            <a:ext cx="10698480" cy="777240"/>
-          </a:xfrm>
-          <a:prstGeom prst="roundRect">
-            <a:avLst>
-              <a:gd name="adj" fmla="val 9412"/>
-            </a:avLst>
-          </a:prstGeom>
-          <a:solidFill>
-            <a:srgbClr val="7C5CAA"/>
-          </a:solidFill>
-          <a:ln/>
-        </p:spPr>
-      </p:sp>
-      <p:sp>
-        <p:nvSpPr>
-          <p:cNvPr id="10" name="Text 8"/>
-          <p:cNvSpPr/>
-          <p:nvPr/>
-        </p:nvSpPr>
-        <p:spPr>
-          <a:xfrm>
-            <a:off x="914400" y="3246120"/>
-            <a:ext cx="548640" cy="777240"/>
-          </a:xfrm>
-          <a:prstGeom prst="rect">
-            <a:avLst/>
-          </a:prstGeom>
-          <a:noFill/>
-          <a:ln/>
-        </p:spPr>
-        <p:txBody>
-          <a:bodyPr wrap="square" lIns="0" tIns="0" rIns="0" bIns="0" rtlCol="0" anchor="ctr"/>
-          <a:lstStyle/>
-          <a:p>
-            <a:pPr indent="0" marL="0">
-              <a:buNone/>
-            </a:pPr>
-            <a:r>
-              <a:rPr lang="en-US" sz="1800" b="1" dirty="0">
-                <a:solidFill>
-                  <a:srgbClr val="FFFFFF"/>
-                </a:solidFill>
-                <a:latin typeface="Arial" pitchFamily="34" charset="0"/>
-                <a:ea typeface="Arial" pitchFamily="34" charset="-122"/>
-                <a:cs typeface="Arial" pitchFamily="34" charset="-120"/>
-              </a:rPr>
-              <a:t>B</a:t>
-            </a:r>
-            <a:endParaRPr lang="en-US" sz="1800" dirty="0"/>
-          </a:p>
-        </p:txBody>
-      </p:sp>
-      <p:sp>
-        <p:nvSpPr>
-          <p:cNvPr id="11" name="Text 9"/>
-          <p:cNvSpPr/>
-          <p:nvPr/>
-        </p:nvSpPr>
-        <p:spPr>
-          <a:xfrm>
-            <a:off x="1554480" y="3246120"/>
-            <a:ext cx="9692640" cy="777240"/>
-          </a:xfrm>
-          <a:prstGeom prst="rect">
-            <a:avLst/>
-          </a:prstGeom>
-          <a:noFill/>
-          <a:ln/>
-        </p:spPr>
-        <p:txBody>
-          <a:bodyPr wrap="square" lIns="0" tIns="0" rIns="0" bIns="0" rtlCol="0" anchor="ctr"/>
-          <a:lstStyle/>
-          <a:p>
-            <a:pPr indent="0" marL="0">
-              <a:buNone/>
-            </a:pPr>
-            <a:r>
-              <a:rPr lang="en-US" sz="1700" dirty="0">
-                <a:solidFill>
-                  <a:srgbClr val="FFFFFF"/>
-                </a:solidFill>
-                <a:latin typeface="Arial" pitchFamily="34" charset="0"/>
-                <a:ea typeface="Arial" pitchFamily="34" charset="-122"/>
-                <a:cs typeface="Arial" pitchFamily="34" charset="-120"/>
-              </a:rPr>
-              <a:t>12.0 m</a:t>
-            </a:r>
-            <a:endParaRPr lang="en-US" sz="1700" dirty="0"/>
-          </a:p>
-        </p:txBody>
-      </p:sp>
-      <p:sp>
-        <p:nvSpPr>
-          <p:cNvPr id="12" name="Shape 10"/>
-          <p:cNvSpPr/>
-          <p:nvPr/>
-        </p:nvSpPr>
-        <p:spPr>
-          <a:xfrm>
-            <a:off x="731520" y="4160520"/>
-            <a:ext cx="10698480" cy="777240"/>
-          </a:xfrm>
-          <a:prstGeom prst="roundRect">
-            <a:avLst>
-              <a:gd name="adj" fmla="val 9412"/>
-            </a:avLst>
-          </a:prstGeom>
-          <a:solidFill>
-            <a:srgbClr val="7C5CAA"/>
-          </a:solidFill>
-          <a:ln/>
-        </p:spPr>
-      </p:sp>
-      <p:sp>
-        <p:nvSpPr>
-          <p:cNvPr id="13" name="Text 11"/>
-          <p:cNvSpPr/>
-          <p:nvPr/>
-        </p:nvSpPr>
-        <p:spPr>
-          <a:xfrm>
-            <a:off x="914400" y="4160520"/>
-            <a:ext cx="548640" cy="777240"/>
-          </a:xfrm>
-          <a:prstGeom prst="rect">
-            <a:avLst/>
-          </a:prstGeom>
-          <a:noFill/>
-          <a:ln/>
-        </p:spPr>
-        <p:txBody>
-          <a:bodyPr wrap="square" lIns="0" tIns="0" rIns="0" bIns="0" rtlCol="0" anchor="ctr"/>
-          <a:lstStyle/>
-          <a:p>
-            <a:pPr indent="0" marL="0">
-              <a:buNone/>
-            </a:pPr>
-            <a:r>
-              <a:rPr lang="en-US" sz="1800" b="1" dirty="0">
-                <a:solidFill>
-                  <a:srgbClr val="FFFFFF"/>
-                </a:solidFill>
-                <a:latin typeface="Arial" pitchFamily="34" charset="0"/>
-                <a:ea typeface="Arial" pitchFamily="34" charset="-122"/>
-                <a:cs typeface="Arial" pitchFamily="34" charset="-120"/>
-              </a:rPr>
-              <a:t>C</a:t>
-            </a:r>
-            <a:endParaRPr lang="en-US" sz="1800" dirty="0"/>
-          </a:p>
-        </p:txBody>
-      </p:sp>
-      <p:sp>
-        <p:nvSpPr>
-          <p:cNvPr id="14" name="Text 12"/>
-          <p:cNvSpPr/>
-          <p:nvPr/>
-        </p:nvSpPr>
-        <p:spPr>
-          <a:xfrm>
-            <a:off x="1554480" y="4160520"/>
-            <a:ext cx="9692640" cy="777240"/>
-          </a:xfrm>
-          <a:prstGeom prst="rect">
-            <a:avLst/>
-          </a:prstGeom>
-          <a:noFill/>
-          <a:ln/>
-        </p:spPr>
-        <p:txBody>
-          <a:bodyPr wrap="square" lIns="0" tIns="0" rIns="0" bIns="0" rtlCol="0" anchor="ctr"/>
-          <a:lstStyle/>
-          <a:p>
-            <a:pPr indent="0" marL="0">
-              <a:buNone/>
-            </a:pPr>
-            <a:r>
-              <a:rPr lang="en-US" sz="1700" dirty="0">
-                <a:solidFill>
-                  <a:srgbClr val="FFFFFF"/>
-                </a:solidFill>
-                <a:latin typeface="Arial" pitchFamily="34" charset="0"/>
-                <a:ea typeface="Arial" pitchFamily="34" charset="-122"/>
-                <a:cs typeface="Arial" pitchFamily="34" charset="-120"/>
-              </a:rPr>
-              <a:t>9.4 m</a:t>
-            </a:r>
-            <a:endParaRPr lang="en-US" sz="1700" dirty="0"/>
-          </a:p>
-        </p:txBody>
-      </p:sp>
-      <p:sp>
-        <p:nvSpPr>
-          <p:cNvPr id="15" name="Shape 13"/>
-          <p:cNvSpPr/>
-          <p:nvPr/>
-        </p:nvSpPr>
-        <p:spPr>
-          <a:xfrm>
-            <a:off x="731520" y="5074920"/>
-            <a:ext cx="10698480" cy="777240"/>
-          </a:xfrm>
-          <a:prstGeom prst="roundRect">
-            <a:avLst>
-              <a:gd name="adj" fmla="val 9412"/>
-            </a:avLst>
-          </a:prstGeom>
-          <a:solidFill>
-            <a:srgbClr val="7C5CAA"/>
-          </a:solidFill>
-          <a:ln/>
-        </p:spPr>
-      </p:sp>
-      <p:sp>
-        <p:nvSpPr>
-          <p:cNvPr id="16" name="Text 14"/>
-          <p:cNvSpPr/>
-          <p:nvPr/>
-        </p:nvSpPr>
-        <p:spPr>
-          <a:xfrm>
-            <a:off x="914400" y="5074920"/>
-            <a:ext cx="548640" cy="777240"/>
-          </a:xfrm>
-          <a:prstGeom prst="rect">
-            <a:avLst/>
-          </a:prstGeom>
-          <a:noFill/>
-          <a:ln/>
-        </p:spPr>
-        <p:txBody>
-          <a:bodyPr wrap="square" lIns="0" tIns="0" rIns="0" bIns="0" rtlCol="0" anchor="ctr"/>
-          <a:lstStyle/>
-          <a:p>
-            <a:pPr indent="0" marL="0">
-              <a:buNone/>
-            </a:pPr>
-            <a:r>
-              <a:rPr lang="en-US" sz="1800" b="1" dirty="0">
-                <a:solidFill>
-                  <a:srgbClr val="FFFFFF"/>
-                </a:solidFill>
-                <a:latin typeface="Arial" pitchFamily="34" charset="0"/>
-                <a:ea typeface="Arial" pitchFamily="34" charset="-122"/>
-                <a:cs typeface="Arial" pitchFamily="34" charset="-120"/>
-              </a:rPr>
-              <a:t>D</a:t>
-            </a:r>
-            <a:endParaRPr lang="en-US" sz="1800" dirty="0"/>
-          </a:p>
-        </p:txBody>
-      </p:sp>
-      <p:sp>
-        <p:nvSpPr>
-          <p:cNvPr id="17" name="Text 15"/>
-          <p:cNvSpPr/>
-          <p:nvPr/>
-        </p:nvSpPr>
-        <p:spPr>
-          <a:xfrm>
-            <a:off x="1554480" y="5074920"/>
-            <a:ext cx="9692640" cy="777240"/>
-          </a:xfrm>
-          <a:prstGeom prst="rect">
-            <a:avLst/>
-          </a:prstGeom>
-          <a:noFill/>
-          <a:ln/>
-        </p:spPr>
-        <p:txBody>
-          <a:bodyPr wrap="square" lIns="0" tIns="0" rIns="0" bIns="0" rtlCol="0" anchor="ctr"/>
-          <a:lstStyle/>
-          <a:p>
-            <a:pPr indent="0" marL="0">
-              <a:buNone/>
-            </a:pPr>
-            <a:r>
-              <a:rPr lang="en-US" sz="1700" dirty="0">
-                <a:solidFill>
-                  <a:srgbClr val="FFFFFF"/>
-                </a:solidFill>
-                <a:latin typeface="Arial" pitchFamily="34" charset="0"/>
-                <a:ea typeface="Arial" pitchFamily="34" charset="-122"/>
-                <a:cs typeface="Arial" pitchFamily="34" charset="-120"/>
-              </a:rPr>
-              <a:t>6.75 m</a:t>
-            </a:r>
-            <a:endParaRPr lang="en-US" sz="1700" dirty="0"/>
-          </a:p>
-        </p:txBody>
-      </p:sp>
-      <p:sp>
-        <p:nvSpPr>
-          <p:cNvPr id="18" name="Text 16"/>
-          <p:cNvSpPr/>
-          <p:nvPr/>
-        </p:nvSpPr>
-        <p:spPr>
-          <a:xfrm>
-            <a:off x="11521440" y="6446520"/>
-            <a:ext cx="457200" cy="274320"/>
-          </a:xfrm>
-          <a:prstGeom prst="rect">
-            <a:avLst/>
-          </a:prstGeom>
-          <a:noFill/>
-          <a:ln/>
-        </p:spPr>
-        <p:txBody>
-          <a:bodyPr wrap="square" lIns="0" tIns="0" rIns="0" bIns="0" rtlCol="0" anchor="ctr"/>
-          <a:lstStyle/>
-          <a:p>
-            <a:pPr algn="r" indent="0" marL="0">
-              <a:buNone/>
-            </a:pPr>
-            <a:r>
-              <a:rPr lang="en-US" sz="1000" dirty="0">
-                <a:solidFill>
-                  <a:srgbClr val="C9B8E0"/>
-                </a:solidFill>
-                <a:latin typeface="Arial" pitchFamily="34" charset="0"/>
-                <a:ea typeface="Arial" pitchFamily="34" charset="-122"/>
-                <a:cs typeface="Arial" pitchFamily="34" charset="-120"/>
-              </a:rPr>
-              <a:t>10</a:t>
-            </a:r>
-            <a:endParaRPr lang="en-US" sz="1000" dirty="0"/>
-          </a:p>
-        </p:txBody>
-      </p:sp>
-    </p:spTree>
-  </p:cSld>
-  <p:clrMapOvr>
-    <a:masterClrMapping/>
-  </p:clrMapOvr>
-</p:sld>
-</file>
-
-<file path=ppt/slides/slide11.xml><?xml version="1.0" encoding="utf-8"?>
-<p:sld xmlns:a="http://schemas.openxmlformats.org/drawingml/2006/main" xmlns:r="http://schemas.openxmlformats.org/officeDocument/2006/relationships" xmlns:p="http://schemas.openxmlformats.org/presentationml/2006/main">
-  <p:cSld name="Slide 11">
-    <p:bg>
-      <p:bgPr>
-        <a:solidFill>
-          <a:srgbClr val="6A4C93"/>
-        </a:solidFill>
-      </p:bgPr>
-    </p:bg>
-    <p:spTree>
-      <p:nvGrpSpPr>
-        <p:cNvPr id="1" name=""/>
-        <p:cNvGrpSpPr/>
-        <p:nvPr/>
-      </p:nvGrpSpPr>
-      <p:grpSpPr>
-        <a:xfrm>
-          <a:off x="0" y="0"/>
-          <a:ext cx="0" cy="0"/>
-          <a:chOff x="0" y="0"/>
-          <a:chExt cx="0" cy="0"/>
-        </a:xfrm>
-      </p:grpSpPr>
-      <p:sp>
-        <p:nvSpPr>
-          <p:cNvPr id="2" name="Text 0"/>
-          <p:cNvSpPr/>
-          <p:nvPr/>
-        </p:nvSpPr>
-        <p:spPr>
-          <a:xfrm>
-            <a:off x="548640" y="365760"/>
-            <a:ext cx="6400800" cy="365760"/>
-          </a:xfrm>
-          <a:prstGeom prst="rect">
-            <a:avLst/>
-          </a:prstGeom>
-          <a:noFill/>
-          <a:ln/>
-        </p:spPr>
-        <p:txBody>
-          <a:bodyPr wrap="square" lIns="0" tIns="0" rIns="0" bIns="0" rtlCol="0" anchor="ctr"/>
-          <a:lstStyle/>
-          <a:p>
-            <a:pPr indent="0" marL="0">
-              <a:buNone/>
-            </a:pPr>
-            <a:r>
-              <a:rPr lang="en-US" sz="1300" b="1" spc="200" kern="0" dirty="0">
-                <a:solidFill>
-                  <a:srgbClr val="E0D6F0"/>
-                </a:solidFill>
-                <a:latin typeface="Arial" pitchFamily="34" charset="0"/>
-                <a:ea typeface="Arial" pitchFamily="34" charset="-122"/>
-                <a:cs typeface="Arial" pitchFamily="34" charset="-120"/>
-              </a:rPr>
-              <a:t>QUESTION 10 OF 10</a:t>
-            </a:r>
-            <a:endParaRPr lang="en-US" sz="1300" dirty="0"/>
-          </a:p>
-        </p:txBody>
-      </p:sp>
-      <p:sp>
-        <p:nvSpPr>
-          <p:cNvPr id="3" name="Shape 1"/>
-          <p:cNvSpPr/>
-          <p:nvPr/>
-        </p:nvSpPr>
-        <p:spPr>
-          <a:xfrm>
-            <a:off x="8138160" y="320040"/>
-            <a:ext cx="3474720" cy="365760"/>
-          </a:xfrm>
-          <a:prstGeom prst="roundRect">
-            <a:avLst>
-              <a:gd name="adj" fmla="val 15000"/>
-            </a:avLst>
-          </a:prstGeom>
-          <a:solidFill>
-            <a:srgbClr val="5A3F80"/>
-          </a:solidFill>
-          <a:ln/>
-        </p:spPr>
-      </p:sp>
-      <p:sp>
-        <p:nvSpPr>
-          <p:cNvPr id="4" name="Text 2"/>
-          <p:cNvSpPr/>
-          <p:nvPr/>
-        </p:nvSpPr>
-        <p:spPr>
-          <a:xfrm>
-            <a:off x="8138160" y="320040"/>
-            <a:ext cx="3474720" cy="365760"/>
-          </a:xfrm>
-          <a:prstGeom prst="rect">
-            <a:avLst/>
-          </a:prstGeom>
-          <a:noFill/>
-          <a:ln/>
-        </p:spPr>
-        <p:txBody>
-          <a:bodyPr wrap="square" lIns="0" tIns="0" rIns="0" bIns="0" rtlCol="0" anchor="ctr"/>
-          <a:lstStyle/>
-          <a:p>
-            <a:pPr algn="ctr" indent="0" marL="0">
-              <a:buNone/>
-            </a:pPr>
-            <a:r>
-              <a:rPr lang="en-US" sz="1100" i="1" dirty="0">
-                <a:solidFill>
-                  <a:srgbClr val="E0D6F0"/>
-                </a:solidFill>
-                <a:latin typeface="Arial" pitchFamily="34" charset="0"/>
-                <a:ea typeface="Arial" pitchFamily="34" charset="-122"/>
-                <a:cs typeface="Arial" pitchFamily="34" charset="-120"/>
-              </a:rPr>
-              <a:t>Use after: Model Building phase</a:t>
-            </a:r>
-            <a:endParaRPr lang="en-US" sz="1100" dirty="0"/>
-          </a:p>
-        </p:txBody>
-      </p:sp>
-      <p:sp>
-        <p:nvSpPr>
-          <p:cNvPr id="5" name="Text 3"/>
-          <p:cNvSpPr/>
-          <p:nvPr/>
-        </p:nvSpPr>
-        <p:spPr>
-          <a:xfrm>
-            <a:off x="548640" y="868680"/>
-            <a:ext cx="11064240" cy="1325880"/>
-          </a:xfrm>
-          <a:prstGeom prst="rect">
-            <a:avLst/>
-          </a:prstGeom>
-          <a:noFill/>
-          <a:ln/>
-        </p:spPr>
-        <p:txBody>
-          <a:bodyPr wrap="square" lIns="0" tIns="0" rIns="0" bIns="0" rtlCol="0" anchor="ctr"/>
-          <a:lstStyle/>
-          <a:p>
-            <a:pPr indent="0" marL="0">
-              <a:buNone/>
-            </a:pPr>
-            <a:r>
-              <a:rPr lang="en-US" sz="1800" b="1" dirty="0">
-                <a:solidFill>
-                  <a:srgbClr val="FFFFFF"/>
-                </a:solidFill>
-                <a:latin typeface="Arial" pitchFamily="34" charset="0"/>
-                <a:ea typeface="Arial" pitchFamily="34" charset="-122"/>
-                <a:cs typeface="Arial" pitchFamily="34" charset="-120"/>
-              </a:rPr>
-              <a:t>On the 'Ratio Web' in the Trigonometry Model, tan θ is linked to sin θ and cos θ. For an angle of 53°, sin 53° ≈ 0.799 and cos 53° ≈ 0.602. Using the identity, what is tan 53° to 3 decimal places?</a:t>
-            </a:r>
-            <a:endParaRPr lang="en-US" sz="1800" dirty="0"/>
-          </a:p>
-        </p:txBody>
-      </p:sp>
-      <p:sp>
-        <p:nvSpPr>
-          <p:cNvPr id="6" name="Shape 4"/>
-          <p:cNvSpPr/>
-          <p:nvPr/>
-        </p:nvSpPr>
-        <p:spPr>
-          <a:xfrm>
-            <a:off x="731520" y="2331720"/>
-            <a:ext cx="10698480" cy="777240"/>
-          </a:xfrm>
-          <a:prstGeom prst="roundRect">
-            <a:avLst>
-              <a:gd name="adj" fmla="val 9412"/>
-            </a:avLst>
-          </a:prstGeom>
-          <a:solidFill>
-            <a:srgbClr val="7C5CAA"/>
-          </a:solidFill>
-          <a:ln/>
-        </p:spPr>
-      </p:sp>
-      <p:sp>
-        <p:nvSpPr>
-          <p:cNvPr id="7" name="Text 5"/>
-          <p:cNvSpPr/>
-          <p:nvPr/>
-        </p:nvSpPr>
-        <p:spPr>
-          <a:xfrm>
-            <a:off x="914400" y="2331720"/>
-            <a:ext cx="548640" cy="777240"/>
-          </a:xfrm>
-          <a:prstGeom prst="rect">
-            <a:avLst/>
-          </a:prstGeom>
-          <a:noFill/>
-          <a:ln/>
-        </p:spPr>
-        <p:txBody>
-          <a:bodyPr wrap="square" lIns="0" tIns="0" rIns="0" bIns="0" rtlCol="0" anchor="ctr"/>
-          <a:lstStyle/>
-          <a:p>
-            <a:pPr indent="0" marL="0">
-              <a:buNone/>
-            </a:pPr>
-            <a:r>
-              <a:rPr lang="en-US" sz="1800" b="1" dirty="0">
-                <a:solidFill>
-                  <a:srgbClr val="FFFFFF"/>
-                </a:solidFill>
-                <a:latin typeface="Arial" pitchFamily="34" charset="0"/>
-                <a:ea typeface="Arial" pitchFamily="34" charset="-122"/>
-                <a:cs typeface="Arial" pitchFamily="34" charset="-120"/>
-              </a:rPr>
-              <a:t>A</a:t>
-            </a:r>
-            <a:endParaRPr lang="en-US" sz="1800" dirty="0"/>
-          </a:p>
-        </p:txBody>
-      </p:sp>
-      <p:sp>
-        <p:nvSpPr>
-          <p:cNvPr id="8" name="Text 6"/>
-          <p:cNvSpPr/>
-          <p:nvPr/>
-        </p:nvSpPr>
-        <p:spPr>
-          <a:xfrm>
-            <a:off x="1554480" y="2331720"/>
-            <a:ext cx="9692640" cy="777240"/>
-          </a:xfrm>
-          <a:prstGeom prst="rect">
-            <a:avLst/>
-          </a:prstGeom>
-          <a:noFill/>
-          <a:ln/>
-        </p:spPr>
-        <p:txBody>
-          <a:bodyPr wrap="square" lIns="0" tIns="0" rIns="0" bIns="0" rtlCol="0" anchor="ctr"/>
-          <a:lstStyle/>
-          <a:p>
-            <a:pPr indent="0" marL="0">
-              <a:buNone/>
-            </a:pPr>
-            <a:r>
-              <a:rPr lang="en-US" sz="1700" dirty="0">
-                <a:solidFill>
-                  <a:srgbClr val="FFFFFF"/>
-                </a:solidFill>
-                <a:latin typeface="Arial" pitchFamily="34" charset="0"/>
-                <a:ea typeface="Arial" pitchFamily="34" charset="-122"/>
-                <a:cs typeface="Arial" pitchFamily="34" charset="-120"/>
-              </a:rPr>
-              <a:t>1.327</a:t>
-            </a:r>
-            <a:endParaRPr lang="en-US" sz="1700" dirty="0"/>
-          </a:p>
-        </p:txBody>
-      </p:sp>
-      <p:sp>
-        <p:nvSpPr>
-          <p:cNvPr id="9" name="Shape 7"/>
-          <p:cNvSpPr/>
-          <p:nvPr/>
-        </p:nvSpPr>
-        <p:spPr>
-          <a:xfrm>
-            <a:off x="731520" y="3246120"/>
-            <a:ext cx="10698480" cy="777240"/>
-          </a:xfrm>
-          <a:prstGeom prst="roundRect">
-            <a:avLst>
-              <a:gd name="adj" fmla="val 9412"/>
-            </a:avLst>
-          </a:prstGeom>
-          <a:solidFill>
-            <a:srgbClr val="7C5CAA"/>
-          </a:solidFill>
-          <a:ln/>
-        </p:spPr>
-      </p:sp>
-      <p:sp>
-        <p:nvSpPr>
-          <p:cNvPr id="10" name="Text 8"/>
-          <p:cNvSpPr/>
-          <p:nvPr/>
-        </p:nvSpPr>
-        <p:spPr>
-          <a:xfrm>
-            <a:off x="914400" y="3246120"/>
-            <a:ext cx="548640" cy="777240"/>
-          </a:xfrm>
-          <a:prstGeom prst="rect">
-            <a:avLst/>
-          </a:prstGeom>
-          <a:noFill/>
-          <a:ln/>
-        </p:spPr>
-        <p:txBody>
-          <a:bodyPr wrap="square" lIns="0" tIns="0" rIns="0" bIns="0" rtlCol="0" anchor="ctr"/>
-          <a:lstStyle/>
-          <a:p>
-            <a:pPr indent="0" marL="0">
-              <a:buNone/>
-            </a:pPr>
-            <a:r>
-              <a:rPr lang="en-US" sz="1800" b="1" dirty="0">
-                <a:solidFill>
-                  <a:srgbClr val="FFFFFF"/>
-                </a:solidFill>
-                <a:latin typeface="Arial" pitchFamily="34" charset="0"/>
-                <a:ea typeface="Arial" pitchFamily="34" charset="-122"/>
-                <a:cs typeface="Arial" pitchFamily="34" charset="-120"/>
-              </a:rPr>
-              <a:t>B</a:t>
-            </a:r>
-            <a:endParaRPr lang="en-US" sz="1800" dirty="0"/>
-          </a:p>
-        </p:txBody>
-      </p:sp>
-      <p:sp>
-        <p:nvSpPr>
-          <p:cNvPr id="11" name="Text 9"/>
-          <p:cNvSpPr/>
-          <p:nvPr/>
-        </p:nvSpPr>
-        <p:spPr>
-          <a:xfrm>
-            <a:off x="1554480" y="3246120"/>
-            <a:ext cx="9692640" cy="777240"/>
-          </a:xfrm>
-          <a:prstGeom prst="rect">
-            <a:avLst/>
-          </a:prstGeom>
-          <a:noFill/>
-          <a:ln/>
-        </p:spPr>
-        <p:txBody>
-          <a:bodyPr wrap="square" lIns="0" tIns="0" rIns="0" bIns="0" rtlCol="0" anchor="ctr"/>
-          <a:lstStyle/>
-          <a:p>
-            <a:pPr indent="0" marL="0">
-              <a:buNone/>
-            </a:pPr>
-            <a:r>
-              <a:rPr lang="en-US" sz="1700" dirty="0">
-                <a:solidFill>
-                  <a:srgbClr val="FFFFFF"/>
-                </a:solidFill>
-                <a:latin typeface="Arial" pitchFamily="34" charset="0"/>
-                <a:ea typeface="Arial" pitchFamily="34" charset="-122"/>
-                <a:cs typeface="Arial" pitchFamily="34" charset="-120"/>
-              </a:rPr>
-              <a:t>0.481</a:t>
-            </a:r>
-            <a:endParaRPr lang="en-US" sz="1700" dirty="0"/>
-          </a:p>
-        </p:txBody>
-      </p:sp>
-      <p:sp>
-        <p:nvSpPr>
-          <p:cNvPr id="12" name="Shape 10"/>
-          <p:cNvSpPr/>
-          <p:nvPr/>
-        </p:nvSpPr>
-        <p:spPr>
-          <a:xfrm>
-            <a:off x="731520" y="4160520"/>
-            <a:ext cx="10698480" cy="777240"/>
-          </a:xfrm>
-          <a:prstGeom prst="roundRect">
-            <a:avLst>
-              <a:gd name="adj" fmla="val 9412"/>
-            </a:avLst>
-          </a:prstGeom>
-          <a:solidFill>
-            <a:srgbClr val="7C5CAA"/>
-          </a:solidFill>
-          <a:ln/>
-        </p:spPr>
-      </p:sp>
-      <p:sp>
-        <p:nvSpPr>
-          <p:cNvPr id="13" name="Text 11"/>
-          <p:cNvSpPr/>
-          <p:nvPr/>
-        </p:nvSpPr>
-        <p:spPr>
-          <a:xfrm>
-            <a:off x="914400" y="4160520"/>
-            <a:ext cx="548640" cy="777240"/>
-          </a:xfrm>
-          <a:prstGeom prst="rect">
-            <a:avLst/>
-          </a:prstGeom>
-          <a:noFill/>
-          <a:ln/>
-        </p:spPr>
-        <p:txBody>
-          <a:bodyPr wrap="square" lIns="0" tIns="0" rIns="0" bIns="0" rtlCol="0" anchor="ctr"/>
-          <a:lstStyle/>
-          <a:p>
-            <a:pPr indent="0" marL="0">
-              <a:buNone/>
-            </a:pPr>
-            <a:r>
-              <a:rPr lang="en-US" sz="1800" b="1" dirty="0">
-                <a:solidFill>
-                  <a:srgbClr val="FFFFFF"/>
-                </a:solidFill>
-                <a:latin typeface="Arial" pitchFamily="34" charset="0"/>
-                <a:ea typeface="Arial" pitchFamily="34" charset="-122"/>
-                <a:cs typeface="Arial" pitchFamily="34" charset="-120"/>
-              </a:rPr>
-              <a:t>C</a:t>
-            </a:r>
-            <a:endParaRPr lang="en-US" sz="1800" dirty="0"/>
-          </a:p>
-        </p:txBody>
-      </p:sp>
-      <p:sp>
-        <p:nvSpPr>
-          <p:cNvPr id="14" name="Text 12"/>
-          <p:cNvSpPr/>
-          <p:nvPr/>
-        </p:nvSpPr>
-        <p:spPr>
-          <a:xfrm>
-            <a:off x="1554480" y="4160520"/>
-            <a:ext cx="9692640" cy="777240"/>
-          </a:xfrm>
-          <a:prstGeom prst="rect">
-            <a:avLst/>
-          </a:prstGeom>
-          <a:noFill/>
-          <a:ln/>
-        </p:spPr>
-        <p:txBody>
-          <a:bodyPr wrap="square" lIns="0" tIns="0" rIns="0" bIns="0" rtlCol="0" anchor="ctr"/>
-          <a:lstStyle/>
-          <a:p>
-            <a:pPr indent="0" marL="0">
-              <a:buNone/>
-            </a:pPr>
-            <a:r>
-              <a:rPr lang="en-US" sz="1700" dirty="0">
-                <a:solidFill>
-                  <a:srgbClr val="FFFFFF"/>
-                </a:solidFill>
-                <a:latin typeface="Arial" pitchFamily="34" charset="0"/>
-                <a:ea typeface="Arial" pitchFamily="34" charset="-122"/>
-                <a:cs typeface="Arial" pitchFamily="34" charset="-120"/>
-              </a:rPr>
-              <a:t>0.753</a:t>
-            </a:r>
-            <a:endParaRPr lang="en-US" sz="1700" dirty="0"/>
-          </a:p>
-        </p:txBody>
-      </p:sp>
-      <p:sp>
-        <p:nvSpPr>
-          <p:cNvPr id="15" name="Shape 13"/>
-          <p:cNvSpPr/>
-          <p:nvPr/>
-        </p:nvSpPr>
-        <p:spPr>
-          <a:xfrm>
-            <a:off x="731520" y="5074920"/>
-            <a:ext cx="10698480" cy="777240"/>
-          </a:xfrm>
-          <a:prstGeom prst="roundRect">
-            <a:avLst>
-              <a:gd name="adj" fmla="val 9412"/>
-            </a:avLst>
-          </a:prstGeom>
-          <a:solidFill>
-            <a:srgbClr val="7C5CAA"/>
-          </a:solidFill>
-          <a:ln/>
-        </p:spPr>
-      </p:sp>
-      <p:sp>
-        <p:nvSpPr>
-          <p:cNvPr id="16" name="Text 14"/>
-          <p:cNvSpPr/>
-          <p:nvPr/>
-        </p:nvSpPr>
-        <p:spPr>
-          <a:xfrm>
-            <a:off x="914400" y="5074920"/>
-            <a:ext cx="548640" cy="777240"/>
-          </a:xfrm>
-          <a:prstGeom prst="rect">
-            <a:avLst/>
-          </a:prstGeom>
-          <a:noFill/>
-          <a:ln/>
-        </p:spPr>
-        <p:txBody>
-          <a:bodyPr wrap="square" lIns="0" tIns="0" rIns="0" bIns="0" rtlCol="0" anchor="ctr"/>
-          <a:lstStyle/>
-          <a:p>
-            <a:pPr indent="0" marL="0">
-              <a:buNone/>
-            </a:pPr>
-            <a:r>
-              <a:rPr lang="en-US" sz="1800" b="1" dirty="0">
-                <a:solidFill>
-                  <a:srgbClr val="FFFFFF"/>
-                </a:solidFill>
-                <a:latin typeface="Arial" pitchFamily="34" charset="0"/>
-                <a:ea typeface="Arial" pitchFamily="34" charset="-122"/>
-                <a:cs typeface="Arial" pitchFamily="34" charset="-120"/>
-              </a:rPr>
-              <a:t>D</a:t>
-            </a:r>
-            <a:endParaRPr lang="en-US" sz="1800" dirty="0"/>
-          </a:p>
-        </p:txBody>
-      </p:sp>
-      <p:sp>
-        <p:nvSpPr>
-          <p:cNvPr id="17" name="Text 15"/>
-          <p:cNvSpPr/>
-          <p:nvPr/>
-        </p:nvSpPr>
-        <p:spPr>
-          <a:xfrm>
-            <a:off x="1554480" y="5074920"/>
-            <a:ext cx="9692640" cy="777240"/>
-          </a:xfrm>
-          <a:prstGeom prst="rect">
-            <a:avLst/>
-          </a:prstGeom>
-          <a:noFill/>
-          <a:ln/>
-        </p:spPr>
-        <p:txBody>
-          <a:bodyPr wrap="square" lIns="0" tIns="0" rIns="0" bIns="0" rtlCol="0" anchor="ctr"/>
-          <a:lstStyle/>
-          <a:p>
-            <a:pPr indent="0" marL="0">
-              <a:buNone/>
-            </a:pPr>
-            <a:r>
-              <a:rPr lang="en-US" sz="1700" dirty="0">
-                <a:solidFill>
-                  <a:srgbClr val="FFFFFF"/>
-                </a:solidFill>
-                <a:latin typeface="Arial" pitchFamily="34" charset="0"/>
-                <a:ea typeface="Arial" pitchFamily="34" charset="-122"/>
-                <a:cs typeface="Arial" pitchFamily="34" charset="-120"/>
-              </a:rPr>
-              <a:t>1.401</a:t>
-            </a:r>
-            <a:endParaRPr lang="en-US" sz="1700" dirty="0"/>
-          </a:p>
-        </p:txBody>
-      </p:sp>
-      <p:sp>
-        <p:nvSpPr>
-          <p:cNvPr id="18" name="Text 16"/>
-          <p:cNvSpPr/>
-          <p:nvPr/>
-        </p:nvSpPr>
-        <p:spPr>
-          <a:xfrm>
-            <a:off x="11521440" y="6446520"/>
-            <a:ext cx="457200" cy="274320"/>
-          </a:xfrm>
-          <a:prstGeom prst="rect">
-            <a:avLst/>
-          </a:prstGeom>
-          <a:noFill/>
-          <a:ln/>
-        </p:spPr>
-        <p:txBody>
-          <a:bodyPr wrap="square" lIns="0" tIns="0" rIns="0" bIns="0" rtlCol="0" anchor="ctr"/>
-          <a:lstStyle/>
-          <a:p>
-            <a:pPr algn="r" indent="0" marL="0">
-              <a:buNone/>
-            </a:pPr>
-            <a:r>
-              <a:rPr lang="en-US" sz="1000" dirty="0">
-                <a:solidFill>
-                  <a:srgbClr val="C9B8E0"/>
-                </a:solidFill>
-                <a:latin typeface="Arial" pitchFamily="34" charset="0"/>
-                <a:ea typeface="Arial" pitchFamily="34" charset="-122"/>
-                <a:cs typeface="Arial" pitchFamily="34" charset="-120"/>
-              </a:rPr>
-              <a:t>11</a:t>
-            </a:r>
-            <a:endParaRPr lang="en-US" sz="1000" dirty="0"/>
-          </a:p>
-        </p:txBody>
-      </p:sp>
-    </p:spTree>
-  </p:cSld>
-  <p:clrMapOvr>
-    <a:masterClrMapping/>
-  </p:clrMapOvr>
-</p:sld>
-</file>
-
-<file path=ppt/slides/slide12.xml><?xml version="1.0" encoding="utf-8"?>
-<p:sld xmlns:a="http://schemas.openxmlformats.org/drawingml/2006/main" xmlns:r="http://schemas.openxmlformats.org/officeDocument/2006/relationships" xmlns:p="http://schemas.openxmlformats.org/presentationml/2006/main">
-  <p:cSld name="Slide 12">
-    <p:bg>
-      <p:bgPr>
-        <a:solidFill>
-          <a:srgbClr val="1F3864"/>
-        </a:solidFill>
-      </p:bgPr>
-    </p:bg>
-    <p:spTree>
-      <p:nvGrpSpPr>
-        <p:cNvPr id="1" name=""/>
-        <p:cNvGrpSpPr/>
-        <p:nvPr/>
-      </p:nvGrpSpPr>
-      <p:grpSpPr>
-        <a:xfrm>
-          <a:off x="0" y="0"/>
-          <a:ext cx="0" cy="0"/>
-          <a:chOff x="0" y="0"/>
-          <a:chExt cx="0" cy="0"/>
-        </a:xfrm>
-      </p:grpSpPr>
-      <p:sp>
-        <p:nvSpPr>
-          <p:cNvPr id="2" name="Text 0"/>
-          <p:cNvSpPr/>
-          <p:nvPr/>
-        </p:nvSpPr>
-        <p:spPr>
-          <a:xfrm>
-            <a:off x="731520" y="2194560"/>
-            <a:ext cx="10698480" cy="822960"/>
-          </a:xfrm>
-          <a:prstGeom prst="rect">
-            <a:avLst/>
-          </a:prstGeom>
-          <a:noFill/>
-          <a:ln/>
-        </p:spPr>
-        <p:txBody>
-          <a:bodyPr wrap="square" lIns="0" tIns="0" rIns="0" bIns="0" rtlCol="0" anchor="ctr"/>
-          <a:lstStyle/>
-          <a:p>
-            <a:pPr indent="0" marL="0">
-              <a:buNone/>
-            </a:pPr>
-            <a:r>
-              <a:rPr lang="en-US" sz="3400" b="1" dirty="0">
-                <a:solidFill>
-                  <a:srgbClr val="FFFFFF"/>
-                </a:solidFill>
-                <a:latin typeface="Arial" pitchFamily="34" charset="0"/>
-                <a:ea typeface="Arial" pitchFamily="34" charset="-122"/>
-                <a:cs typeface="Arial" pitchFamily="34" charset="-120"/>
-              </a:rPr>
-              <a:t>All done</a:t>
-            </a:r>
-            <a:endParaRPr lang="en-US" sz="3400" dirty="0"/>
-          </a:p>
-        </p:txBody>
-      </p:sp>
-      <p:sp>
-        <p:nvSpPr>
-          <p:cNvPr id="3" name="Text 1"/>
-          <p:cNvSpPr/>
-          <p:nvPr/>
-        </p:nvSpPr>
-        <p:spPr>
-          <a:xfrm>
-            <a:off x="731520" y="3108960"/>
-            <a:ext cx="10698480" cy="731520"/>
-          </a:xfrm>
-          <a:prstGeom prst="rect">
-            <a:avLst/>
-          </a:prstGeom>
-          <a:noFill/>
-          <a:ln/>
-        </p:spPr>
-        <p:txBody>
-          <a:bodyPr wrap="square" lIns="0" tIns="0" rIns="0" bIns="0" rtlCol="0" anchor="ctr"/>
-          <a:lstStyle/>
-          <a:p>
-            <a:pPr indent="0" marL="0">
-              <a:buNone/>
-            </a:pPr>
-            <a:r>
-              <a:rPr lang="en-US" sz="1800" dirty="0">
-                <a:solidFill>
-                  <a:srgbClr val="D9EEF1"/>
-                </a:solidFill>
-                <a:latin typeface="Arial" pitchFamily="34" charset="0"/>
-                <a:ea typeface="Arial" pitchFamily="34" charset="-122"/>
-                <a:cs typeface="Arial" pitchFamily="34" charset="-120"/>
-              </a:rPr>
-              <a:t>Ask your teacher how to submit your answers today (for example, on a paper answer slip).</a:t>
-            </a:r>
-            <a:endParaRPr lang="en-US" sz="1800" dirty="0"/>
           </a:p>
         </p:txBody>
       </p:sp>
@@ -3518,7 +1921,7 @@
                 <a:ea typeface="Arial" pitchFamily="34" charset="-122"/>
                 <a:cs typeface="Arial" pitchFamily="34" charset="-120"/>
               </a:rPr>
-              <a:t>QUESTION 1 OF 10</a:t>
+              <a:t>QUESTION 1 OF 7</a:t>
             </a:r>
             <a:endParaRPr lang="en-US" sz="1300" dirty="0"/>
           </a:p>
@@ -3610,7 +2013,7 @@
               <a:buNone/>
             </a:pPr>
             <a:r>
-              <a:rPr lang="en-US" sz="1600" b="1" dirty="0">
+              <a:rPr lang="en-US" sz="1800" b="1" dirty="0">
                 <a:solidFill>
                   <a:srgbClr val="FFFFFF"/>
                 </a:solidFill>
@@ -3618,9 +2021,9 @@
                 <a:ea typeface="Arial" pitchFamily="34" charset="-122"/>
                 <a:cs typeface="Arial" pitchFamily="34" charset="-120"/>
               </a:rPr>
-              <a:t>In Kisumu, a student measures the sun's angle with the ground as 53°. The mango tree's shadow on the ground is 9.0 m long. She wants the tree's height. The tree is vertical and the ground is horizontal. Which ratio links the two lengths she knows or wants (height and shadow) with the 53° angle?</a:t>
-            </a:r>
-            <a:endParaRPr lang="en-US" sz="1600" dirty="0"/>
+              <a:t>A student in Kisumu measures the sun's angle with the ground as 53°. The shadow of a vertical mango tree on level ground is 9.0 m long. Which equation connects the angle, the shadow and the tree's height h directly?</a:t>
+            </a:r>
+            <a:endParaRPr lang="en-US" sz="1800" dirty="0"/>
           </a:p>
         </p:txBody>
       </p:sp>
@@ -3710,7 +2113,7 @@
               <a:buNone/>
             </a:pPr>
             <a:r>
-              <a:rPr lang="en-US" sz="1500" dirty="0">
+              <a:rPr lang="en-US" sz="1700" dirty="0">
                 <a:solidFill>
                   <a:srgbClr val="FFFFFF"/>
                 </a:solidFill>
@@ -3718,9 +2121,9 @@
                 <a:ea typeface="Arial" pitchFamily="34" charset="-122"/>
                 <a:cs typeface="Arial" pitchFamily="34" charset="-120"/>
               </a:rPr>
-              <a:t>No ratio works unless she first measures the length of the sun's ray (the hypotenuse)</a:t>
-            </a:r>
-            <a:endParaRPr lang="en-US" sz="1500" dirty="0"/>
+              <a:t>tan 53° = 9.0 / h</a:t>
+            </a:r>
+            <a:endParaRPr lang="en-US" sz="1700" dirty="0"/>
           </a:p>
         </p:txBody>
       </p:sp>
@@ -3810,7 +2213,7 @@
               <a:buNone/>
             </a:pPr>
             <a:r>
-              <a:rPr lang="en-US" sz="1500" dirty="0">
+              <a:rPr lang="en-US" sz="1700" dirty="0">
                 <a:solidFill>
                   <a:srgbClr val="FFFFFF"/>
                 </a:solidFill>
@@ -3818,9 +2221,9 @@
                 <a:ea typeface="Arial" pitchFamily="34" charset="-122"/>
                 <a:cs typeface="Arial" pitchFamily="34" charset="-120"/>
               </a:rPr>
-              <a:t>sin 53°, because sine is the most useful ratio for every triangle</a:t>
-            </a:r>
-            <a:endParaRPr lang="en-US" sz="1500" dirty="0"/>
+              <a:t>tan 53° = h / 9.0</a:t>
+            </a:r>
+            <a:endParaRPr lang="en-US" sz="1700" dirty="0"/>
           </a:p>
         </p:txBody>
       </p:sp>
@@ -3910,7 +2313,7 @@
               <a:buNone/>
             </a:pPr>
             <a:r>
-              <a:rPr lang="en-US" sz="1500" dirty="0">
+              <a:rPr lang="en-US" sz="1700" dirty="0">
                 <a:solidFill>
                   <a:srgbClr val="FFFFFF"/>
                 </a:solidFill>
@@ -3918,9 +2321,9 @@
                 <a:ea typeface="Arial" pitchFamily="34" charset="-122"/>
                 <a:cs typeface="Arial" pitchFamily="34" charset="-120"/>
               </a:rPr>
-              <a:t>cos 53°, because the shadow is on the ground</a:t>
-            </a:r>
-            <a:endParaRPr lang="en-US" sz="1500" dirty="0"/>
+              <a:t>cos 53° = h / 9.0</a:t>
+            </a:r>
+            <a:endParaRPr lang="en-US" sz="1700" dirty="0"/>
           </a:p>
         </p:txBody>
       </p:sp>
@@ -4010,7 +2413,7 @@
               <a:buNone/>
             </a:pPr>
             <a:r>
-              <a:rPr lang="en-US" sz="1500" dirty="0">
+              <a:rPr lang="en-US" sz="1700" dirty="0">
                 <a:solidFill>
                   <a:srgbClr val="FFFFFF"/>
                 </a:solidFill>
@@ -4018,9 +2421,9 @@
                 <a:ea typeface="Arial" pitchFamily="34" charset="-122"/>
                 <a:cs typeface="Arial" pitchFamily="34" charset="-120"/>
               </a:rPr>
-              <a:t>tan 53°, because it links the opposite side (height) and the adjacent side (shadow)</a:t>
-            </a:r>
-            <a:endParaRPr lang="en-US" sz="1500" dirty="0"/>
+              <a:t>sin 53° = h / 9.0</a:t>
+            </a:r>
+            <a:endParaRPr lang="en-US" sz="1700" dirty="0"/>
           </a:p>
         </p:txBody>
       </p:sp>
@@ -4128,7 +2531,7 @@
                 <a:ea typeface="Arial" pitchFamily="34" charset="-122"/>
                 <a:cs typeface="Arial" pitchFamily="34" charset="-120"/>
               </a:rPr>
-              <a:t>QUESTION 2 OF 10</a:t>
+              <a:t>QUESTION 2 OF 7</a:t>
             </a:r>
             <a:endParaRPr lang="en-US" sz="1300" dirty="0"/>
           </a:p>
@@ -4220,7 +2623,7 @@
               <a:buNone/>
             </a:pPr>
             <a:r>
-              <a:rPr lang="en-US" sz="2300" b="1" dirty="0">
+              <a:rPr lang="en-US" sz="2000" b="1" dirty="0">
                 <a:solidFill>
                   <a:srgbClr val="FFFFFF"/>
                 </a:solidFill>
@@ -4228,9 +2631,9 @@
                 <a:ea typeface="Arial" pitchFamily="34" charset="-122"/>
                 <a:cs typeface="Arial" pitchFamily="34" charset="-120"/>
               </a:rPr>
-              <a:t>In a right-angled triangle, sin θ = O/H and cos θ = A/H. What do we get when we simplify (O/H) ÷ (A/H) = (O/H) × (H/A)?</a:t>
-            </a:r>
-            <a:endParaRPr lang="en-US" sz="2300" dirty="0"/>
+              <a:t>In a right-angled triangle, sin θ = O/H and cos θ = A/H. What is sin θ ÷ cos θ, that is (O/H) ÷ (A/H), after simplifying?</a:t>
+            </a:r>
+            <a:endParaRPr lang="en-US" sz="2000" dirty="0"/>
           </a:p>
         </p:txBody>
       </p:sp>
@@ -4328,7 +2731,7 @@
                 <a:ea typeface="Arial" pitchFamily="34" charset="-122"/>
                 <a:cs typeface="Arial" pitchFamily="34" charset="-120"/>
               </a:rPr>
-              <a:t>O/A, which is tan θ</a:t>
+              <a:t>(O × A) / H²</a:t>
             </a:r>
             <a:endParaRPr lang="en-US" sz="1700" dirty="0"/>
           </a:p>
@@ -4428,7 +2831,7 @@
                 <a:ea typeface="Arial" pitchFamily="34" charset="-122"/>
                 <a:cs typeface="Arial" pitchFamily="34" charset="-120"/>
               </a:rPr>
-              <a:t>O/H</a:t>
+              <a:t>O / H</a:t>
             </a:r>
             <a:endParaRPr lang="en-US" sz="1700" dirty="0"/>
           </a:p>
@@ -4528,7 +2931,7 @@
                 <a:ea typeface="Arial" pitchFamily="34" charset="-122"/>
                 <a:cs typeface="Arial" pitchFamily="34" charset="-120"/>
               </a:rPr>
-              <a:t>A/O</a:t>
+              <a:t>O / A</a:t>
             </a:r>
             <a:endParaRPr lang="en-US" sz="1700" dirty="0"/>
           </a:p>
@@ -4628,7 +3031,7 @@
                 <a:ea typeface="Arial" pitchFamily="34" charset="-122"/>
                 <a:cs typeface="Arial" pitchFamily="34" charset="-120"/>
               </a:rPr>
-              <a:t>H/A</a:t>
+              <a:t>A / O</a:t>
             </a:r>
             <a:endParaRPr lang="en-US" sz="1700" dirty="0"/>
           </a:p>
@@ -4738,7 +3141,7 @@
                 <a:ea typeface="Arial" pitchFamily="34" charset="-122"/>
                 <a:cs typeface="Arial" pitchFamily="34" charset="-120"/>
               </a:rPr>
-              <a:t>QUESTION 3 OF 10</a:t>
+              <a:t>QUESTION 3 OF 7</a:t>
             </a:r>
             <a:endParaRPr lang="en-US" sz="1300" dirty="0"/>
           </a:p>
@@ -4838,7 +3241,7 @@
                 <a:ea typeface="Arial" pitchFamily="34" charset="-122"/>
                 <a:cs typeface="Arial" pitchFamily="34" charset="-120"/>
               </a:rPr>
-              <a:t>A right-angled triangle has sides of 6 cm, 8 cm and 10 cm (the hypotenuse). For the angle θ opposite the 6 cm side, what is tan θ?</a:t>
+              <a:t>From mathematical tables, sin 40° = 0.6428 and cos 40° = 0.7660. What is sin 40° ÷ cos 40°, to 3 decimal places, and which table value does it match?</a:t>
             </a:r>
             <a:endParaRPr lang="en-US" sz="2000" dirty="0"/>
           </a:p>
@@ -4938,7 +3341,7 @@
                 <a:ea typeface="Arial" pitchFamily="34" charset="-122"/>
                 <a:cs typeface="Arial" pitchFamily="34" charset="-120"/>
               </a:rPr>
-              <a:t>1.33</a:t>
+              <a:t>1.41, which matches tan 40°</a:t>
             </a:r>
             <a:endParaRPr lang="en-US" sz="1700" dirty="0"/>
           </a:p>
@@ -5038,7 +3441,7 @@
                 <a:ea typeface="Arial" pitchFamily="34" charset="-122"/>
                 <a:cs typeface="Arial" pitchFamily="34" charset="-120"/>
               </a:rPr>
-              <a:t>0.75</a:t>
+              <a:t>0.839, which matches tan 40°</a:t>
             </a:r>
             <a:endParaRPr lang="en-US" sz="1700" dirty="0"/>
           </a:p>
@@ -5138,7 +3541,7 @@
                 <a:ea typeface="Arial" pitchFamily="34" charset="-122"/>
                 <a:cs typeface="Arial" pitchFamily="34" charset="-120"/>
               </a:rPr>
-              <a:t>0.6</a:t>
+              <a:t>1.19, which matches tan 50°</a:t>
             </a:r>
             <a:endParaRPr lang="en-US" sz="1700" dirty="0"/>
           </a:p>
@@ -5238,7 +3641,7 @@
                 <a:ea typeface="Arial" pitchFamily="34" charset="-122"/>
                 <a:cs typeface="Arial" pitchFamily="34" charset="-120"/>
               </a:rPr>
-              <a:t>0.8</a:t>
+              <a:t>0.49, which matches tan 40°</a:t>
             </a:r>
             <a:endParaRPr lang="en-US" sz="1700" dirty="0"/>
           </a:p>
@@ -5348,7 +3751,7 @@
                 <a:ea typeface="Arial" pitchFamily="34" charset="-122"/>
                 <a:cs typeface="Arial" pitchFamily="34" charset="-120"/>
               </a:rPr>
-              <a:t>QUESTION 4 OF 10</a:t>
+              <a:t>QUESTION 4 OF 7</a:t>
             </a:r>
             <a:endParaRPr lang="en-US" sz="1300" dirty="0"/>
           </a:p>
@@ -5409,7 +3812,7 @@
                 <a:ea typeface="Arial" pitchFamily="34" charset="-122"/>
                 <a:cs typeface="Arial" pitchFamily="34" charset="-120"/>
               </a:rPr>
-              <a:t>Use after: Observe phase</a:t>
+              <a:t>Use after: Explain phase</a:t>
             </a:r>
             <a:endParaRPr lang="en-US" sz="1100" dirty="0"/>
           </a:p>
@@ -5440,7 +3843,7 @@
               <a:buNone/>
             </a:pPr>
             <a:r>
-              <a:rPr lang="en-US" sz="2000" b="1" dirty="0">
+              <a:rPr lang="en-US" sz="2300" b="1" dirty="0">
                 <a:solidFill>
                   <a:srgbClr val="FFFFFF"/>
                 </a:solidFill>
@@ -5448,9 +3851,9 @@
                 <a:ea typeface="Arial" pitchFamily="34" charset="-122"/>
                 <a:cs typeface="Arial" pitchFamily="34" charset="-120"/>
               </a:rPr>
-              <a:t>From mathematical tables, sin 40° = 0.6428 and cos 40° = 0.7660. Using tan θ = sin θ ÷ cos θ, what is tan 40° to 3 decimal places?</a:t>
-            </a:r>
-            <a:endParaRPr lang="en-US" sz="2000" dirty="0"/>
+              <a:t>We have proved that tan θ = sin θ / cos θ, so tan can be found from sin and cos. Why is the tangent ratio still useful?</a:t>
+            </a:r>
+            <a:endParaRPr lang="en-US" sz="2300" dirty="0"/>
           </a:p>
         </p:txBody>
       </p:sp>
@@ -5540,7 +3943,7 @@
               <a:buNone/>
             </a:pPr>
             <a:r>
-              <a:rPr lang="en-US" sz="1700" dirty="0">
+              <a:rPr lang="en-US" sz="1500" dirty="0">
                 <a:solidFill>
                   <a:srgbClr val="FFFFFF"/>
                 </a:solidFill>
@@ -5548,9 +3951,9 @@
                 <a:ea typeface="Arial" pitchFamily="34" charset="-122"/>
                 <a:cs typeface="Arial" pitchFamily="34" charset="-120"/>
               </a:rPr>
-              <a:t>1.409</a:t>
-            </a:r>
-            <a:endParaRPr lang="en-US" sz="1700" dirty="0"/>
+              <a:t>It is only useful when we know the hypotenuse</a:t>
+            </a:r>
+            <a:endParaRPr lang="en-US" sz="1500" dirty="0"/>
           </a:p>
         </p:txBody>
       </p:sp>
@@ -5640,7 +4043,7 @@
               <a:buNone/>
             </a:pPr>
             <a:r>
-              <a:rPr lang="en-US" sz="1700" dirty="0">
+              <a:rPr lang="en-US" sz="1500" dirty="0">
                 <a:solidFill>
                   <a:srgbClr val="FFFFFF"/>
                 </a:solidFill>
@@ -5648,9 +4051,9 @@
                 <a:ea typeface="Arial" pitchFamily="34" charset="-122"/>
                 <a:cs typeface="Arial" pitchFamily="34" charset="-120"/>
               </a:rPr>
-              <a:t>0.839</a:t>
-            </a:r>
-            <a:endParaRPr lang="en-US" sz="1700" dirty="0"/>
+              <a:t>It gives a direct route when we know an angle and one of the opposite or adjacent sides but not the hypotenuse</a:t>
+            </a:r>
+            <a:endParaRPr lang="en-US" sz="1500" dirty="0"/>
           </a:p>
         </p:txBody>
       </p:sp>
@@ -5740,7 +4143,7 @@
               <a:buNone/>
             </a:pPr>
             <a:r>
-              <a:rPr lang="en-US" sz="1700" dirty="0">
+              <a:rPr lang="en-US" sz="1500" dirty="0">
                 <a:solidFill>
                   <a:srgbClr val="FFFFFF"/>
                 </a:solidFill>
@@ -5748,9 +4151,9 @@
                 <a:ea typeface="Arial" pitchFamily="34" charset="-122"/>
                 <a:cs typeface="Arial" pitchFamily="34" charset="-120"/>
               </a:rPr>
-              <a:t>1.192</a:t>
-            </a:r>
-            <a:endParaRPr lang="en-US" sz="1700" dirty="0"/>
+              <a:t>It is only useful for angles of 53°</a:t>
+            </a:r>
+            <a:endParaRPr lang="en-US" sz="1500" dirty="0"/>
           </a:p>
         </p:txBody>
       </p:sp>
@@ -5840,7 +4243,7 @@
               <a:buNone/>
             </a:pPr>
             <a:r>
-              <a:rPr lang="en-US" sz="1700" dirty="0">
+              <a:rPr lang="en-US" sz="1500" dirty="0">
                 <a:solidFill>
                   <a:srgbClr val="FFFFFF"/>
                 </a:solidFill>
@@ -5848,9 +4251,9 @@
                 <a:ea typeface="Arial" pitchFamily="34" charset="-122"/>
                 <a:cs typeface="Arial" pitchFamily="34" charset="-120"/>
               </a:rPr>
-              <a:t>0.492</a:t>
-            </a:r>
-            <a:endParaRPr lang="en-US" sz="1700" dirty="0"/>
+              <a:t>It is not useful, because sin and cos can always replace it</a:t>
+            </a:r>
+            <a:endParaRPr lang="en-US" sz="1500" dirty="0"/>
           </a:p>
         </p:txBody>
       </p:sp>
@@ -5958,7 +4361,7 @@
                 <a:ea typeface="Arial" pitchFamily="34" charset="-122"/>
                 <a:cs typeface="Arial" pitchFamily="34" charset="-120"/>
               </a:rPr>
-              <a:t>QUESTION 5 OF 10</a:t>
+              <a:t>QUESTION 5 OF 7</a:t>
             </a:r>
             <a:endParaRPr lang="en-US" sz="1300" dirty="0"/>
           </a:p>
@@ -6019,7 +4422,7 @@
                 <a:ea typeface="Arial" pitchFamily="34" charset="-122"/>
                 <a:cs typeface="Arial" pitchFamily="34" charset="-120"/>
               </a:rPr>
-              <a:t>Use after: Observe phase</a:t>
+              <a:t>Use after: Explain phase</a:t>
             </a:r>
             <a:endParaRPr lang="en-US" sz="1100" dirty="0"/>
           </a:p>
@@ -6050,7 +4453,7 @@
               <a:buNone/>
             </a:pPr>
             <a:r>
-              <a:rPr lang="en-US" sz="2000" b="1" dirty="0">
+              <a:rPr lang="en-US" sz="1600" b="1" dirty="0">
                 <a:solidFill>
                   <a:srgbClr val="FFFFFF"/>
                 </a:solidFill>
@@ -6058,9 +4461,9 @@
                 <a:ea typeface="Arial" pitchFamily="34" charset="-122"/>
                 <a:cs typeface="Arial" pitchFamily="34" charset="-120"/>
               </a:rPr>
-              <a:t>A pair finds that for one angle, sin θ ÷ cos θ is 0.8391 and tan θ read from tables is 0.8390. What is the most sensible explanation of this tiny difference?</a:t>
-            </a:r>
-            <a:endParaRPr lang="en-US" sz="2000" dirty="0"/>
+              <a:t>The sun's rays make a 53° angle with level ground. A vertical tree of height h casts a 9.0 m shadow on the ground, forming a right-angled triangle. The 53° angle is at the tip of the shadow. Which side of the triangle is the 9.0 m shadow, relative to the 53° angle?</a:t>
+            </a:r>
+            <a:endParaRPr lang="en-US" sz="1600" dirty="0"/>
           </a:p>
         </p:txBody>
       </p:sp>
@@ -6150,7 +4553,7 @@
               <a:buNone/>
             </a:pPr>
             <a:r>
-              <a:rPr lang="en-US" sz="1700" dirty="0">
+              <a:rPr lang="en-US" sz="1500" dirty="0">
                 <a:solidFill>
                   <a:srgbClr val="FFFFFF"/>
                 </a:solidFill>
@@ -6158,9 +4561,9 @@
                 <a:ea typeface="Arial" pitchFamily="34" charset="-122"/>
                 <a:cs typeface="Arial" pitchFamily="34" charset="-120"/>
               </a:rPr>
-              <a:t>They used the wrong triangle, because tan changes with the size of the triangle</a:t>
-            </a:r>
-            <a:endParaRPr lang="en-US" sz="1700" dirty="0"/>
+              <a:t>The adjacent side, because it lies next to the 53° angle and is not the hypotenuse</a:t>
+            </a:r>
+            <a:endParaRPr lang="en-US" sz="1500" dirty="0"/>
           </a:p>
         </p:txBody>
       </p:sp>
@@ -6250,7 +4653,7 @@
               <a:buNone/>
             </a:pPr>
             <a:r>
-              <a:rPr lang="en-US" sz="1700" dirty="0">
+              <a:rPr lang="en-US" sz="1500" dirty="0">
                 <a:solidFill>
                   <a:srgbClr val="FFFFFF"/>
                 </a:solidFill>
@@ -6258,9 +4661,9 @@
                 <a:ea typeface="Arial" pitchFamily="34" charset="-122"/>
                 <a:cs typeface="Arial" pitchFamily="34" charset="-120"/>
               </a:rPr>
-              <a:t>The identity only works for 45°</a:t>
-            </a:r>
-            <a:endParaRPr lang="en-US" sz="1700" dirty="0"/>
+              <a:t>It cannot be named until the tree height is known</a:t>
+            </a:r>
+            <a:endParaRPr lang="en-US" sz="1500" dirty="0"/>
           </a:p>
         </p:txBody>
       </p:sp>
@@ -6350,7 +4753,7 @@
               <a:buNone/>
             </a:pPr>
             <a:r>
-              <a:rPr lang="en-US" sz="1700" dirty="0">
+              <a:rPr lang="en-US" sz="1500" dirty="0">
                 <a:solidFill>
                   <a:srgbClr val="FFFFFF"/>
                 </a:solidFill>
@@ -6358,9 +4761,9 @@
                 <a:ea typeface="Arial" pitchFamily="34" charset="-122"/>
                 <a:cs typeface="Arial" pitchFamily="34" charset="-120"/>
               </a:rPr>
-              <a:t>Table values are rounded, so tiny differences are expected</a:t>
-            </a:r>
-            <a:endParaRPr lang="en-US" sz="1700" dirty="0"/>
+              <a:t>The hypotenuse, because it is the length we measured</a:t>
+            </a:r>
+            <a:endParaRPr lang="en-US" sz="1500" dirty="0"/>
           </a:p>
         </p:txBody>
       </p:sp>
@@ -6450,7 +4853,7 @@
               <a:buNone/>
             </a:pPr>
             <a:r>
-              <a:rPr lang="en-US" sz="1700" dirty="0">
+              <a:rPr lang="en-US" sz="1500" dirty="0">
                 <a:solidFill>
                   <a:srgbClr val="FFFFFF"/>
                 </a:solidFill>
@@ -6458,9 +4861,9 @@
                 <a:ea typeface="Arial" pitchFamily="34" charset="-122"/>
                 <a:cs typeface="Arial" pitchFamily="34" charset="-120"/>
               </a:rPr>
-              <a:t>The identity tan θ = sin θ / cos θ does not work for that angle</a:t>
-            </a:r>
-            <a:endParaRPr lang="en-US" sz="1700" dirty="0"/>
+              <a:t>The opposite side, because it lies on the ground</a:t>
+            </a:r>
+            <a:endParaRPr lang="en-US" sz="1500" dirty="0"/>
           </a:p>
         </p:txBody>
       </p:sp>
@@ -6568,7 +4971,7 @@
                 <a:ea typeface="Arial" pitchFamily="34" charset="-122"/>
                 <a:cs typeface="Arial" pitchFamily="34" charset="-120"/>
               </a:rPr>
-              <a:t>QUESTION 6 OF 10</a:t>
+              <a:t>QUESTION 6 OF 7</a:t>
             </a:r>
             <a:endParaRPr lang="en-US" sz="1300" dirty="0"/>
           </a:p>
@@ -6660,7 +5063,7 @@
               <a:buNone/>
             </a:pPr>
             <a:r>
-              <a:rPr lang="en-US" sz="2300" b="1" dirty="0">
+              <a:rPr lang="en-US" sz="2000" b="1" dirty="0">
                 <a:solidFill>
                   <a:srgbClr val="FFFFFF"/>
                 </a:solidFill>
@@ -6668,9 +5071,9 @@
                 <a:ea typeface="Arial" pitchFamily="34" charset="-122"/>
                 <a:cs typeface="Arial" pitchFamily="34" charset="-120"/>
               </a:rPr>
-              <a:t>A learner says, "We can already get tan θ from sin θ and cos θ, so tan is unnecessary." What is the best reply?</a:t>
-            </a:r>
-            <a:endParaRPr lang="en-US" sz="2300" dirty="0"/>
+              <a:t>A mango tree casts a 9.0 m shadow when the sun's angle with the ground is 53°. Using tan 53° ≈ 1.3270 from tables, what is the height of the tree, to 2 decimal places?</a:t>
+            </a:r>
+            <a:endParaRPr lang="en-US" sz="2000" dirty="0"/>
           </a:p>
         </p:txBody>
       </p:sp>
@@ -6760,7 +5163,7 @@
               <a:buNone/>
             </a:pPr>
             <a:r>
-              <a:rPr lang="en-US" sz="1500" dirty="0">
+              <a:rPr lang="en-US" sz="1700" dirty="0">
                 <a:solidFill>
                   <a:srgbClr val="FFFFFF"/>
                 </a:solidFill>
@@ -6768,9 +5171,9 @@
                 <a:ea typeface="Arial" pitchFamily="34" charset="-122"/>
                 <a:cs typeface="Arial" pitchFamily="34" charset="-120"/>
               </a:rPr>
-              <a:t>Tan can only be used when the hypotenuse is known</a:t>
-            </a:r>
-            <a:endParaRPr lang="en-US" sz="1500" dirty="0"/>
+              <a:t>0.15 m</a:t>
+            </a:r>
+            <a:endParaRPr lang="en-US" sz="1700" dirty="0"/>
           </a:p>
         </p:txBody>
       </p:sp>
@@ -6860,7 +5263,7 @@
               <a:buNone/>
             </a:pPr>
             <a:r>
-              <a:rPr lang="en-US" sz="1500" dirty="0">
+              <a:rPr lang="en-US" sz="1700" dirty="0">
                 <a:solidFill>
                   <a:srgbClr val="FFFFFF"/>
                 </a:solidFill>
@@ -6868,9 +5271,9 @@
                 <a:ea typeface="Arial" pitchFamily="34" charset="-122"/>
                 <a:cs typeface="Arial" pitchFamily="34" charset="-120"/>
               </a:rPr>
-              <a:t>Tan is only used for angles bigger than 90°</a:t>
-            </a:r>
-            <a:endParaRPr lang="en-US" sz="1500" dirty="0"/>
+              <a:t>10.33 m</a:t>
+            </a:r>
+            <a:endParaRPr lang="en-US" sz="1700" dirty="0"/>
           </a:p>
         </p:txBody>
       </p:sp>
@@ -6960,7 +5363,7 @@
               <a:buNone/>
             </a:pPr>
             <a:r>
-              <a:rPr lang="en-US" sz="1500" dirty="0">
+              <a:rPr lang="en-US" sz="1700" dirty="0">
                 <a:solidFill>
                   <a:srgbClr val="FFFFFF"/>
                 </a:solidFill>
@@ -6968,9 +5371,9 @@
                 <a:ea typeface="Arial" pitchFamily="34" charset="-122"/>
                 <a:cs typeface="Arial" pitchFamily="34" charset="-120"/>
               </a:rPr>
-              <a:t>They are right: tan is redundant and is never needed</a:t>
-            </a:r>
-            <a:endParaRPr lang="en-US" sz="1500" dirty="0"/>
+              <a:t>6.78 m</a:t>
+            </a:r>
+            <a:endParaRPr lang="en-US" sz="1700" dirty="0"/>
           </a:p>
         </p:txBody>
       </p:sp>
@@ -7060,7 +5463,7 @@
               <a:buNone/>
             </a:pPr>
             <a:r>
-              <a:rPr lang="en-US" sz="1500" dirty="0">
+              <a:rPr lang="en-US" sz="1700" dirty="0">
                 <a:solidFill>
                   <a:srgbClr val="FFFFFF"/>
                 </a:solidFill>
@@ -7068,9 +5471,9 @@
                 <a:ea typeface="Arial" pitchFamily="34" charset="-122"/>
                 <a:cs typeface="Arial" pitchFamily="34" charset="-120"/>
               </a:rPr>
-              <a:t>Tan is a convenient shortcut when we know an angle and one side but not the hypotenuse</a:t>
-            </a:r>
-            <a:endParaRPr lang="en-US" sz="1500" dirty="0"/>
+              <a:t>11.94 m</a:t>
+            </a:r>
+            <a:endParaRPr lang="en-US" sz="1700" dirty="0"/>
           </a:p>
         </p:txBody>
       </p:sp>
@@ -7178,7 +5581,7 @@
                 <a:ea typeface="Arial" pitchFamily="34" charset="-122"/>
                 <a:cs typeface="Arial" pitchFamily="34" charset="-120"/>
               </a:rPr>
-              <a:t>QUESTION 7 OF 10</a:t>
+              <a:t>QUESTION 7 OF 7</a:t>
             </a:r>
             <a:endParaRPr lang="en-US" sz="1300" dirty="0"/>
           </a:p>
@@ -7239,7 +5642,7 @@
                 <a:ea typeface="Arial" pitchFamily="34" charset="-122"/>
                 <a:cs typeface="Arial" pitchFamily="34" charset="-120"/>
               </a:rPr>
-              <a:t>Use after: Explain phase</a:t>
+              <a:t>Use after: Model Building phase</a:t>
             </a:r>
             <a:endParaRPr lang="en-US" sz="1100" dirty="0"/>
           </a:p>
@@ -7270,7 +5673,7 @@
               <a:buNone/>
             </a:pPr>
             <a:r>
-              <a:rPr lang="en-US" sz="1800" b="1" dirty="0">
+              <a:rPr lang="en-US" sz="2000" b="1" dirty="0">
                 <a:solidFill>
                   <a:srgbClr val="FFFFFF"/>
                 </a:solidFill>
@@ -7278,9 +5681,9 @@
                 <a:ea typeface="Arial" pitchFamily="34" charset="-122"/>
                 <a:cs typeface="Arial" pitchFamily="34" charset="-120"/>
               </a:rPr>
-              <a:t>The sun makes an angle of 53° with the ground. A vertical mango tree of height h casts a 9.0 m shadow along the ground, and the 53° angle is at the end of the shadow, between the ground and the sun's ray. Which statement is correct?</a:t>
-            </a:r>
-            <a:endParaRPr lang="en-US" sz="1800" dirty="0"/>
+              <a:t>The same 53° sun angle at the same time of day gives the same tangent ratio for a small pole and for a tall tree. Why does tan θ = Opposite/Adjacent work for triangles of any size?</a:t>
+            </a:r>
+            <a:endParaRPr lang="en-US" sz="2000" dirty="0"/>
           </a:p>
         </p:txBody>
       </p:sp>
@@ -7378,7 +5781,7 @@
                 <a:ea typeface="Arial" pitchFamily="34" charset="-122"/>
                 <a:cs typeface="Arial" pitchFamily="34" charset="-120"/>
               </a:rPr>
-              <a:t>The 9.0 m shadow is the side opposite the 53° angle, and the tree height h is the side adjacent to it</a:t>
+              <a:t>Because the ratio Opposite/Adjacent stays constant for a given angle, whatever the size of the triangle</a:t>
             </a:r>
             <a:endParaRPr lang="en-US" sz="1500" dirty="0"/>
           </a:p>
@@ -7478,7 +5881,7 @@
                 <a:ea typeface="Arial" pitchFamily="34" charset="-122"/>
                 <a:cs typeface="Arial" pitchFamily="34" charset="-120"/>
               </a:rPr>
-              <a:t>Both the shadow and the tree are adjacent to the 53° angle</a:t>
+              <a:t>Because the ratio gets bigger as the shadow gets longer</a:t>
             </a:r>
             <a:endParaRPr lang="en-US" sz="1500" dirty="0"/>
           </a:p>
@@ -7578,7 +5981,7 @@
                 <a:ea typeface="Arial" pitchFamily="34" charset="-122"/>
                 <a:cs typeface="Arial" pitchFamily="34" charset="-120"/>
               </a:rPr>
-              <a:t>The 9.0 m shadow is the side adjacent to the 53° angle, and the tree height h is the side opposite it</a:t>
+              <a:t>Because the opposite side is always equal to the adjacent side</a:t>
             </a:r>
             <a:endParaRPr lang="en-US" sz="1500" dirty="0"/>
           </a:p>
@@ -7678,7 +6081,7 @@
                 <a:ea typeface="Arial" pitchFamily="34" charset="-122"/>
                 <a:cs typeface="Arial" pitchFamily="34" charset="-120"/>
               </a:rPr>
-              <a:t>The 9.0 m shadow is the hypotenuse</a:t>
+              <a:t>Because tan θ depends on the length of the hypotenuse</a:t>
             </a:r>
             <a:endParaRPr lang="en-US" sz="1500" dirty="0"/>
           </a:p>
@@ -7737,7 +6140,7 @@
     <p:bg>
       <p:bgPr>
         <a:solidFill>
-          <a:srgbClr val="6A4C93"/>
+          <a:srgbClr val="1F3864"/>
         </a:solidFill>
       </p:bgPr>
     </p:bg>
@@ -7763,124 +6166,24 @@
         </p:nvSpPr>
         <p:spPr>
           <a:xfrm>
-            <a:off x="548640" y="365760"/>
-            <a:ext cx="6400800" cy="365760"/>
-          </a:xfrm>
-          <a:prstGeom prst="rect">
-            <a:avLst/>
-          </a:prstGeom>
-          <a:noFill/>
-          <a:ln/>
-        </p:spPr>
-        <p:txBody>
-          <a:bodyPr wrap="square" lIns="0" tIns="0" rIns="0" bIns="0" rtlCol="0" anchor="ctr"/>
-          <a:lstStyle/>
-          <a:p>
-            <a:pPr indent="0" marL="0">
-              <a:buNone/>
-            </a:pPr>
-            <a:r>
-              <a:rPr lang="en-US" sz="1300" b="1" spc="200" kern="0" dirty="0">
-                <a:solidFill>
-                  <a:srgbClr val="E0D6F0"/>
-                </a:solidFill>
-                <a:latin typeface="Arial" pitchFamily="34" charset="0"/>
-                <a:ea typeface="Arial" pitchFamily="34" charset="-122"/>
-                <a:cs typeface="Arial" pitchFamily="34" charset="-120"/>
-              </a:rPr>
-              <a:t>QUESTION 8 OF 10</a:t>
-            </a:r>
-            <a:endParaRPr lang="en-US" sz="1300" dirty="0"/>
-          </a:p>
-        </p:txBody>
-      </p:sp>
-      <p:sp>
-        <p:nvSpPr>
-          <p:cNvPr id="3" name="Shape 1"/>
-          <p:cNvSpPr/>
-          <p:nvPr/>
-        </p:nvSpPr>
-        <p:spPr>
-          <a:xfrm>
-            <a:off x="8138160" y="320040"/>
-            <a:ext cx="3474720" cy="365760"/>
-          </a:xfrm>
-          <a:prstGeom prst="roundRect">
-            <a:avLst>
-              <a:gd name="adj" fmla="val 15000"/>
-            </a:avLst>
-          </a:prstGeom>
-          <a:solidFill>
-            <a:srgbClr val="5A3F80"/>
-          </a:solidFill>
-          <a:ln/>
-        </p:spPr>
-      </p:sp>
-      <p:sp>
-        <p:nvSpPr>
-          <p:cNvPr id="4" name="Text 2"/>
-          <p:cNvSpPr/>
-          <p:nvPr/>
-        </p:nvSpPr>
-        <p:spPr>
-          <a:xfrm>
-            <a:off x="8138160" y="320040"/>
-            <a:ext cx="3474720" cy="365760"/>
-          </a:xfrm>
-          <a:prstGeom prst="rect">
-            <a:avLst/>
-          </a:prstGeom>
-          <a:noFill/>
-          <a:ln/>
-        </p:spPr>
-        <p:txBody>
-          <a:bodyPr wrap="square" lIns="0" tIns="0" rIns="0" bIns="0" rtlCol="0" anchor="ctr"/>
-          <a:lstStyle/>
-          <a:p>
-            <a:pPr algn="ctr" indent="0" marL="0">
-              <a:buNone/>
-            </a:pPr>
-            <a:r>
-              <a:rPr lang="en-US" sz="1100" i="1" dirty="0">
-                <a:solidFill>
-                  <a:srgbClr val="E0D6F0"/>
-                </a:solidFill>
-                <a:latin typeface="Arial" pitchFamily="34" charset="0"/>
-                <a:ea typeface="Arial" pitchFamily="34" charset="-122"/>
-                <a:cs typeface="Arial" pitchFamily="34" charset="-120"/>
-              </a:rPr>
-              <a:t>Use after: Explain phase</a:t>
-            </a:r>
-            <a:endParaRPr lang="en-US" sz="1100" dirty="0"/>
-          </a:p>
-        </p:txBody>
-      </p:sp>
-      <p:sp>
-        <p:nvSpPr>
-          <p:cNvPr id="5" name="Text 3"/>
-          <p:cNvSpPr/>
-          <p:nvPr/>
-        </p:nvSpPr>
-        <p:spPr>
-          <a:xfrm>
-            <a:off x="548640" y="868680"/>
-            <a:ext cx="11064240" cy="1325880"/>
-          </a:xfrm>
-          <a:prstGeom prst="rect">
-            <a:avLst/>
-          </a:prstGeom>
-          <a:noFill/>
-          <a:ln/>
-        </p:spPr>
-        <p:txBody>
-          <a:bodyPr wrap="square" lIns="0" tIns="0" rIns="0" bIns="0" rtlCol="0" anchor="ctr"/>
-          <a:lstStyle/>
-          <a:p>
-            <a:pPr indent="0" marL="0">
-              <a:buNone/>
-            </a:pPr>
-            <a:r>
-              <a:rPr lang="en-US" sz="2000" b="1" dirty="0">
+            <a:off x="731520" y="2194560"/>
+            <a:ext cx="10698480" cy="822960"/>
+          </a:xfrm>
+          <a:prstGeom prst="rect">
+            <a:avLst/>
+          </a:prstGeom>
+          <a:noFill/>
+          <a:ln/>
+        </p:spPr>
+        <p:txBody>
+          <a:bodyPr wrap="square" lIns="0" tIns="0" rIns="0" bIns="0" rtlCol="0" anchor="ctr"/>
+          <a:lstStyle/>
+          <a:p>
+            <a:pPr indent="0" marL="0">
+              <a:buNone/>
+            </a:pPr>
+            <a:r>
+              <a:rPr lang="en-US" sz="3400" b="1" dirty="0">
                 <a:solidFill>
                   <a:srgbClr val="FFFFFF"/>
                 </a:solidFill>
@@ -7888,448 +6191,48 @@
                 <a:ea typeface="Arial" pitchFamily="34" charset="-122"/>
                 <a:cs typeface="Arial" pitchFamily="34" charset="-120"/>
               </a:rPr>
-              <a:t>A mango tree has a shadow 9.0 m long when the sun makes an angle of 53° with the ground. Given tan 53° = 1.3270 and tan 53° = h ÷ 9.0, what is the height h of the tree?</a:t>
-            </a:r>
-            <a:endParaRPr lang="en-US" sz="2000" dirty="0"/>
-          </a:p>
-        </p:txBody>
-      </p:sp>
-      <p:sp>
-        <p:nvSpPr>
-          <p:cNvPr id="6" name="Shape 4"/>
-          <p:cNvSpPr/>
-          <p:nvPr/>
-        </p:nvSpPr>
-        <p:spPr>
-          <a:xfrm>
-            <a:off x="731520" y="2331720"/>
-            <a:ext cx="10698480" cy="777240"/>
-          </a:xfrm>
-          <a:prstGeom prst="roundRect">
-            <a:avLst>
-              <a:gd name="adj" fmla="val 9412"/>
-            </a:avLst>
-          </a:prstGeom>
-          <a:solidFill>
-            <a:srgbClr val="7C5CAA"/>
-          </a:solidFill>
-          <a:ln/>
-        </p:spPr>
-      </p:sp>
-      <p:sp>
-        <p:nvSpPr>
-          <p:cNvPr id="7" name="Text 5"/>
-          <p:cNvSpPr/>
-          <p:nvPr/>
-        </p:nvSpPr>
-        <p:spPr>
-          <a:xfrm>
-            <a:off x="914400" y="2331720"/>
-            <a:ext cx="548640" cy="777240"/>
-          </a:xfrm>
-          <a:prstGeom prst="rect">
-            <a:avLst/>
-          </a:prstGeom>
-          <a:noFill/>
-          <a:ln/>
-        </p:spPr>
-        <p:txBody>
-          <a:bodyPr wrap="square" lIns="0" tIns="0" rIns="0" bIns="0" rtlCol="0" anchor="ctr"/>
-          <a:lstStyle/>
-          <a:p>
-            <a:pPr indent="0" marL="0">
-              <a:buNone/>
-            </a:pPr>
-            <a:r>
-              <a:rPr lang="en-US" sz="1800" b="1" dirty="0">
-                <a:solidFill>
-                  <a:srgbClr val="FFFFFF"/>
-                </a:solidFill>
-                <a:latin typeface="Arial" pitchFamily="34" charset="0"/>
-                <a:ea typeface="Arial" pitchFamily="34" charset="-122"/>
-                <a:cs typeface="Arial" pitchFamily="34" charset="-120"/>
-              </a:rPr>
-              <a:t>A</a:t>
+              <a:t>All done</a:t>
+            </a:r>
+            <a:endParaRPr lang="en-US" sz="3400" dirty="0"/>
+          </a:p>
+        </p:txBody>
+      </p:sp>
+      <p:sp>
+        <p:nvSpPr>
+          <p:cNvPr id="3" name="Text 1"/>
+          <p:cNvSpPr/>
+          <p:nvPr/>
+        </p:nvSpPr>
+        <p:spPr>
+          <a:xfrm>
+            <a:off x="731520" y="3108960"/>
+            <a:ext cx="10698480" cy="731520"/>
+          </a:xfrm>
+          <a:prstGeom prst="rect">
+            <a:avLst/>
+          </a:prstGeom>
+          <a:noFill/>
+          <a:ln/>
+        </p:spPr>
+        <p:txBody>
+          <a:bodyPr wrap="square" lIns="0" tIns="0" rIns="0" bIns="0" rtlCol="0" anchor="ctr"/>
+          <a:lstStyle/>
+          <a:p>
+            <a:pPr indent="0" marL="0">
+              <a:buNone/>
+            </a:pPr>
+            <a:r>
+              <a:rPr lang="en-US" sz="1800" dirty="0">
+                <a:solidFill>
+                  <a:srgbClr val="D9EEF1"/>
+                </a:solidFill>
+                <a:latin typeface="Arial" pitchFamily="34" charset="0"/>
+                <a:ea typeface="Arial" pitchFamily="34" charset="-122"/>
+                <a:cs typeface="Arial" pitchFamily="34" charset="-120"/>
+              </a:rPr>
+              <a:t>Ask your teacher how to submit your answers today (for example, on a paper answer slip).</a:t>
             </a:r>
             <a:endParaRPr lang="en-US" sz="1800" dirty="0"/>
-          </a:p>
-        </p:txBody>
-      </p:sp>
-      <p:sp>
-        <p:nvSpPr>
-          <p:cNvPr id="8" name="Text 6"/>
-          <p:cNvSpPr/>
-          <p:nvPr/>
-        </p:nvSpPr>
-        <p:spPr>
-          <a:xfrm>
-            <a:off x="1554480" y="2331720"/>
-            <a:ext cx="9692640" cy="777240"/>
-          </a:xfrm>
-          <a:prstGeom prst="rect">
-            <a:avLst/>
-          </a:prstGeom>
-          <a:noFill/>
-          <a:ln/>
-        </p:spPr>
-        <p:txBody>
-          <a:bodyPr wrap="square" lIns="0" tIns="0" rIns="0" bIns="0" rtlCol="0" anchor="ctr"/>
-          <a:lstStyle/>
-          <a:p>
-            <a:pPr indent="0" marL="0">
-              <a:buNone/>
-            </a:pPr>
-            <a:r>
-              <a:rPr lang="en-US" sz="1700" dirty="0">
-                <a:solidFill>
-                  <a:srgbClr val="FFFFFF"/>
-                </a:solidFill>
-                <a:latin typeface="Arial" pitchFamily="34" charset="0"/>
-                <a:ea typeface="Arial" pitchFamily="34" charset="-122"/>
-                <a:cs typeface="Arial" pitchFamily="34" charset="-120"/>
-              </a:rPr>
-              <a:t>5.42 m</a:t>
-            </a:r>
-            <a:endParaRPr lang="en-US" sz="1700" dirty="0"/>
-          </a:p>
-        </p:txBody>
-      </p:sp>
-      <p:sp>
-        <p:nvSpPr>
-          <p:cNvPr id="9" name="Shape 7"/>
-          <p:cNvSpPr/>
-          <p:nvPr/>
-        </p:nvSpPr>
-        <p:spPr>
-          <a:xfrm>
-            <a:off x="731520" y="3246120"/>
-            <a:ext cx="10698480" cy="777240"/>
-          </a:xfrm>
-          <a:prstGeom prst="roundRect">
-            <a:avLst>
-              <a:gd name="adj" fmla="val 9412"/>
-            </a:avLst>
-          </a:prstGeom>
-          <a:solidFill>
-            <a:srgbClr val="7C5CAA"/>
-          </a:solidFill>
-          <a:ln/>
-        </p:spPr>
-      </p:sp>
-      <p:sp>
-        <p:nvSpPr>
-          <p:cNvPr id="10" name="Text 8"/>
-          <p:cNvSpPr/>
-          <p:nvPr/>
-        </p:nvSpPr>
-        <p:spPr>
-          <a:xfrm>
-            <a:off x="914400" y="3246120"/>
-            <a:ext cx="548640" cy="777240"/>
-          </a:xfrm>
-          <a:prstGeom prst="rect">
-            <a:avLst/>
-          </a:prstGeom>
-          <a:noFill/>
-          <a:ln/>
-        </p:spPr>
-        <p:txBody>
-          <a:bodyPr wrap="square" lIns="0" tIns="0" rIns="0" bIns="0" rtlCol="0" anchor="ctr"/>
-          <a:lstStyle/>
-          <a:p>
-            <a:pPr indent="0" marL="0">
-              <a:buNone/>
-            </a:pPr>
-            <a:r>
-              <a:rPr lang="en-US" sz="1800" b="1" dirty="0">
-                <a:solidFill>
-                  <a:srgbClr val="FFFFFF"/>
-                </a:solidFill>
-                <a:latin typeface="Arial" pitchFamily="34" charset="0"/>
-                <a:ea typeface="Arial" pitchFamily="34" charset="-122"/>
-                <a:cs typeface="Arial" pitchFamily="34" charset="-120"/>
-              </a:rPr>
-              <a:t>B</a:t>
-            </a:r>
-            <a:endParaRPr lang="en-US" sz="1800" dirty="0"/>
-          </a:p>
-        </p:txBody>
-      </p:sp>
-      <p:sp>
-        <p:nvSpPr>
-          <p:cNvPr id="11" name="Text 9"/>
-          <p:cNvSpPr/>
-          <p:nvPr/>
-        </p:nvSpPr>
-        <p:spPr>
-          <a:xfrm>
-            <a:off x="1554480" y="3246120"/>
-            <a:ext cx="9692640" cy="777240"/>
-          </a:xfrm>
-          <a:prstGeom prst="rect">
-            <a:avLst/>
-          </a:prstGeom>
-          <a:noFill/>
-          <a:ln/>
-        </p:spPr>
-        <p:txBody>
-          <a:bodyPr wrap="square" lIns="0" tIns="0" rIns="0" bIns="0" rtlCol="0" anchor="ctr"/>
-          <a:lstStyle/>
-          <a:p>
-            <a:pPr indent="0" marL="0">
-              <a:buNone/>
-            </a:pPr>
-            <a:r>
-              <a:rPr lang="en-US" sz="1700" dirty="0">
-                <a:solidFill>
-                  <a:srgbClr val="FFFFFF"/>
-                </a:solidFill>
-                <a:latin typeface="Arial" pitchFamily="34" charset="0"/>
-                <a:ea typeface="Arial" pitchFamily="34" charset="-122"/>
-                <a:cs typeface="Arial" pitchFamily="34" charset="-120"/>
-              </a:rPr>
-              <a:t>11.943 m</a:t>
-            </a:r>
-            <a:endParaRPr lang="en-US" sz="1700" dirty="0"/>
-          </a:p>
-        </p:txBody>
-      </p:sp>
-      <p:sp>
-        <p:nvSpPr>
-          <p:cNvPr id="12" name="Shape 10"/>
-          <p:cNvSpPr/>
-          <p:nvPr/>
-        </p:nvSpPr>
-        <p:spPr>
-          <a:xfrm>
-            <a:off x="731520" y="4160520"/>
-            <a:ext cx="10698480" cy="777240"/>
-          </a:xfrm>
-          <a:prstGeom prst="roundRect">
-            <a:avLst>
-              <a:gd name="adj" fmla="val 9412"/>
-            </a:avLst>
-          </a:prstGeom>
-          <a:solidFill>
-            <a:srgbClr val="7C5CAA"/>
-          </a:solidFill>
-          <a:ln/>
-        </p:spPr>
-      </p:sp>
-      <p:sp>
-        <p:nvSpPr>
-          <p:cNvPr id="13" name="Text 11"/>
-          <p:cNvSpPr/>
-          <p:nvPr/>
-        </p:nvSpPr>
-        <p:spPr>
-          <a:xfrm>
-            <a:off x="914400" y="4160520"/>
-            <a:ext cx="548640" cy="777240"/>
-          </a:xfrm>
-          <a:prstGeom prst="rect">
-            <a:avLst/>
-          </a:prstGeom>
-          <a:noFill/>
-          <a:ln/>
-        </p:spPr>
-        <p:txBody>
-          <a:bodyPr wrap="square" lIns="0" tIns="0" rIns="0" bIns="0" rtlCol="0" anchor="ctr"/>
-          <a:lstStyle/>
-          <a:p>
-            <a:pPr indent="0" marL="0">
-              <a:buNone/>
-            </a:pPr>
-            <a:r>
-              <a:rPr lang="en-US" sz="1800" b="1" dirty="0">
-                <a:solidFill>
-                  <a:srgbClr val="FFFFFF"/>
-                </a:solidFill>
-                <a:latin typeface="Arial" pitchFamily="34" charset="0"/>
-                <a:ea typeface="Arial" pitchFamily="34" charset="-122"/>
-                <a:cs typeface="Arial" pitchFamily="34" charset="-120"/>
-              </a:rPr>
-              <a:t>C</a:t>
-            </a:r>
-            <a:endParaRPr lang="en-US" sz="1800" dirty="0"/>
-          </a:p>
-        </p:txBody>
-      </p:sp>
-      <p:sp>
-        <p:nvSpPr>
-          <p:cNvPr id="14" name="Text 12"/>
-          <p:cNvSpPr/>
-          <p:nvPr/>
-        </p:nvSpPr>
-        <p:spPr>
-          <a:xfrm>
-            <a:off x="1554480" y="4160520"/>
-            <a:ext cx="9692640" cy="777240"/>
-          </a:xfrm>
-          <a:prstGeom prst="rect">
-            <a:avLst/>
-          </a:prstGeom>
-          <a:noFill/>
-          <a:ln/>
-        </p:spPr>
-        <p:txBody>
-          <a:bodyPr wrap="square" lIns="0" tIns="0" rIns="0" bIns="0" rtlCol="0" anchor="ctr"/>
-          <a:lstStyle/>
-          <a:p>
-            <a:pPr indent="0" marL="0">
-              <a:buNone/>
-            </a:pPr>
-            <a:r>
-              <a:rPr lang="en-US" sz="1700" dirty="0">
-                <a:solidFill>
-                  <a:srgbClr val="FFFFFF"/>
-                </a:solidFill>
-                <a:latin typeface="Arial" pitchFamily="34" charset="0"/>
-                <a:ea typeface="Arial" pitchFamily="34" charset="-122"/>
-                <a:cs typeface="Arial" pitchFamily="34" charset="-120"/>
-              </a:rPr>
-              <a:t>7.19 m</a:t>
-            </a:r>
-            <a:endParaRPr lang="en-US" sz="1700" dirty="0"/>
-          </a:p>
-        </p:txBody>
-      </p:sp>
-      <p:sp>
-        <p:nvSpPr>
-          <p:cNvPr id="15" name="Shape 13"/>
-          <p:cNvSpPr/>
-          <p:nvPr/>
-        </p:nvSpPr>
-        <p:spPr>
-          <a:xfrm>
-            <a:off x="731520" y="5074920"/>
-            <a:ext cx="10698480" cy="777240"/>
-          </a:xfrm>
-          <a:prstGeom prst="roundRect">
-            <a:avLst>
-              <a:gd name="adj" fmla="val 9412"/>
-            </a:avLst>
-          </a:prstGeom>
-          <a:solidFill>
-            <a:srgbClr val="7C5CAA"/>
-          </a:solidFill>
-          <a:ln/>
-        </p:spPr>
-      </p:sp>
-      <p:sp>
-        <p:nvSpPr>
-          <p:cNvPr id="16" name="Text 14"/>
-          <p:cNvSpPr/>
-          <p:nvPr/>
-        </p:nvSpPr>
-        <p:spPr>
-          <a:xfrm>
-            <a:off x="914400" y="5074920"/>
-            <a:ext cx="548640" cy="777240"/>
-          </a:xfrm>
-          <a:prstGeom prst="rect">
-            <a:avLst/>
-          </a:prstGeom>
-          <a:noFill/>
-          <a:ln/>
-        </p:spPr>
-        <p:txBody>
-          <a:bodyPr wrap="square" lIns="0" tIns="0" rIns="0" bIns="0" rtlCol="0" anchor="ctr"/>
-          <a:lstStyle/>
-          <a:p>
-            <a:pPr indent="0" marL="0">
-              <a:buNone/>
-            </a:pPr>
-            <a:r>
-              <a:rPr lang="en-US" sz="1800" b="1" dirty="0">
-                <a:solidFill>
-                  <a:srgbClr val="FFFFFF"/>
-                </a:solidFill>
-                <a:latin typeface="Arial" pitchFamily="34" charset="0"/>
-                <a:ea typeface="Arial" pitchFamily="34" charset="-122"/>
-                <a:cs typeface="Arial" pitchFamily="34" charset="-120"/>
-              </a:rPr>
-              <a:t>D</a:t>
-            </a:r>
-            <a:endParaRPr lang="en-US" sz="1800" dirty="0"/>
-          </a:p>
-        </p:txBody>
-      </p:sp>
-      <p:sp>
-        <p:nvSpPr>
-          <p:cNvPr id="17" name="Text 15"/>
-          <p:cNvSpPr/>
-          <p:nvPr/>
-        </p:nvSpPr>
-        <p:spPr>
-          <a:xfrm>
-            <a:off x="1554480" y="5074920"/>
-            <a:ext cx="9692640" cy="777240"/>
-          </a:xfrm>
-          <a:prstGeom prst="rect">
-            <a:avLst/>
-          </a:prstGeom>
-          <a:noFill/>
-          <a:ln/>
-        </p:spPr>
-        <p:txBody>
-          <a:bodyPr wrap="square" lIns="0" tIns="0" rIns="0" bIns="0" rtlCol="0" anchor="ctr"/>
-          <a:lstStyle/>
-          <a:p>
-            <a:pPr indent="0" marL="0">
-              <a:buNone/>
-            </a:pPr>
-            <a:r>
-              <a:rPr lang="en-US" sz="1700" dirty="0">
-                <a:solidFill>
-                  <a:srgbClr val="FFFFFF"/>
-                </a:solidFill>
-                <a:latin typeface="Arial" pitchFamily="34" charset="0"/>
-                <a:ea typeface="Arial" pitchFamily="34" charset="-122"/>
-                <a:cs typeface="Arial" pitchFamily="34" charset="-120"/>
-              </a:rPr>
-              <a:t>6.78 m</a:t>
-            </a:r>
-            <a:endParaRPr lang="en-US" sz="1700" dirty="0"/>
-          </a:p>
-        </p:txBody>
-      </p:sp>
-      <p:sp>
-        <p:nvSpPr>
-          <p:cNvPr id="18" name="Text 16"/>
-          <p:cNvSpPr/>
-          <p:nvPr/>
-        </p:nvSpPr>
-        <p:spPr>
-          <a:xfrm>
-            <a:off x="11521440" y="6446520"/>
-            <a:ext cx="457200" cy="274320"/>
-          </a:xfrm>
-          <a:prstGeom prst="rect">
-            <a:avLst/>
-          </a:prstGeom>
-          <a:noFill/>
-          <a:ln/>
-        </p:spPr>
-        <p:txBody>
-          <a:bodyPr wrap="square" lIns="0" tIns="0" rIns="0" bIns="0" rtlCol="0" anchor="ctr"/>
-          <a:lstStyle/>
-          <a:p>
-            <a:pPr algn="r" indent="0" marL="0">
-              <a:buNone/>
-            </a:pPr>
-            <a:r>
-              <a:rPr lang="en-US" sz="1000" dirty="0">
-                <a:solidFill>
-                  <a:srgbClr val="C9B8E0"/>
-                </a:solidFill>
-                <a:latin typeface="Arial" pitchFamily="34" charset="0"/>
-                <a:ea typeface="Arial" pitchFamily="34" charset="-122"/>
-                <a:cs typeface="Arial" pitchFamily="34" charset="-120"/>
-              </a:rPr>
-              <a:t>9</a:t>
-            </a:r>
-            <a:endParaRPr lang="en-US" sz="1000" dirty="0"/>
           </a:p>
         </p:txBody>
       </p:sp>
